--- a/Documentation/Final Presentation.pptx
+++ b/Documentation/Final Presentation.pptx
@@ -7,11 +7,10 @@
   <p:sldIdLst>
     <p:sldId id="256" r:id="rId2"/>
     <p:sldId id="257" r:id="rId3"/>
-    <p:sldId id="258" r:id="rId4"/>
-    <p:sldId id="262" r:id="rId5"/>
-    <p:sldId id="259" r:id="rId6"/>
-    <p:sldId id="260" r:id="rId7"/>
-    <p:sldId id="261" r:id="rId8"/>
+    <p:sldId id="262" r:id="rId4"/>
+    <p:sldId id="259" r:id="rId5"/>
+    <p:sldId id="260" r:id="rId6"/>
+    <p:sldId id="261" r:id="rId7"/>
   </p:sldIdLst>
   <p:sldSz cx="12192000" cy="6858000"/>
   <p:notesSz cx="6858000" cy="9144000"/>
@@ -4941,7 +4940,7 @@
           <p:cNvPr id="2" name="Title 1">
             <a:extLst>
               <a:ext uri="{FF2B5EF4-FFF2-40B4-BE49-F238E27FC236}">
-                <a16:creationId xmlns:a16="http://schemas.microsoft.com/office/drawing/2014/main" id="{4E4266C1-FD9F-0487-E78C-B9077D85DFFE}"/>
+                <a16:creationId xmlns:a16="http://schemas.microsoft.com/office/drawing/2014/main" id="{BECEAD95-E2F3-1454-3809-832098E09252}"/>
               </a:ext>
             </a:extLst>
           </p:cNvPr>
@@ -4957,39 +4956,42 @@
           <a:bodyPr/>
           <a:lstStyle/>
           <a:p>
+            <a:r>
+              <a:rPr lang="en-US" dirty="0"/>
+              <a:t>Part 1 – Deep Learning</a:t>
+            </a:r>
+          </a:p>
+        </p:txBody>
+      </p:sp>
+      <p:sp>
+        <p:nvSpPr>
+          <p:cNvPr id="3" name="Content Placeholder 2">
+            <a:extLst>
+              <a:ext uri="{FF2B5EF4-FFF2-40B4-BE49-F238E27FC236}">
+                <a16:creationId xmlns:a16="http://schemas.microsoft.com/office/drawing/2014/main" id="{9977B685-5EAF-7CEA-BF76-3B9365AED698}"/>
+              </a:ext>
+            </a:extLst>
+          </p:cNvPr>
+          <p:cNvSpPr>
+            <a:spLocks noGrp="1"/>
+          </p:cNvSpPr>
+          <p:nvPr>
+            <p:ph idx="1"/>
+          </p:nvPr>
+        </p:nvSpPr>
+        <p:spPr/>
+        <p:txBody>
+          <a:bodyPr/>
+          <a:lstStyle/>
+          <a:p>
             <a:endParaRPr lang="en-US"/>
-          </a:p>
-        </p:txBody>
-      </p:sp>
-      <p:sp>
-        <p:nvSpPr>
-          <p:cNvPr id="3" name="Content Placeholder 2">
-            <a:extLst>
-              <a:ext uri="{FF2B5EF4-FFF2-40B4-BE49-F238E27FC236}">
-                <a16:creationId xmlns:a16="http://schemas.microsoft.com/office/drawing/2014/main" id="{2037A500-2ACC-1771-B6C9-32B94B9A7E21}"/>
-              </a:ext>
-            </a:extLst>
-          </p:cNvPr>
-          <p:cNvSpPr>
-            <a:spLocks noGrp="1"/>
-          </p:cNvSpPr>
-          <p:nvPr>
-            <p:ph idx="1"/>
-          </p:nvPr>
-        </p:nvSpPr>
-        <p:spPr/>
-        <p:txBody>
-          <a:bodyPr/>
-          <a:lstStyle/>
-          <a:p>
-            <a:endParaRPr lang="en-US" dirty="0"/>
           </a:p>
         </p:txBody>
       </p:sp>
     </p:spTree>
     <p:extLst>
       <p:ext uri="{BB962C8B-B14F-4D97-AF65-F5344CB8AC3E}">
-        <p14:creationId xmlns:p14="http://schemas.microsoft.com/office/powerpoint/2010/main" val="3485419797"/>
+        <p14:creationId xmlns:p14="http://schemas.microsoft.com/office/powerpoint/2010/main" val="700886777"/>
       </p:ext>
     </p:extLst>
   </p:cSld>
@@ -5021,7 +5023,7 @@
           <p:cNvPr id="2" name="Title 1">
             <a:extLst>
               <a:ext uri="{FF2B5EF4-FFF2-40B4-BE49-F238E27FC236}">
-                <a16:creationId xmlns:a16="http://schemas.microsoft.com/office/drawing/2014/main" id="{BECEAD95-E2F3-1454-3809-832098E09252}"/>
+                <a16:creationId xmlns:a16="http://schemas.microsoft.com/office/drawing/2014/main" id="{68F4FC0C-A23E-D74B-F1DF-5D461D21668D}"/>
               </a:ext>
             </a:extLst>
           </p:cNvPr>
@@ -5039,7 +5041,7 @@
           <a:p>
             <a:r>
               <a:rPr lang="en-US" dirty="0"/>
-              <a:t>Part 1 – Deep Learning</a:t>
+              <a:t>Part 2 – Traditional</a:t>
             </a:r>
           </a:p>
         </p:txBody>
@@ -5049,7 +5051,7 @@
           <p:cNvPr id="3" name="Content Placeholder 2">
             <a:extLst>
               <a:ext uri="{FF2B5EF4-FFF2-40B4-BE49-F238E27FC236}">
-                <a16:creationId xmlns:a16="http://schemas.microsoft.com/office/drawing/2014/main" id="{9977B685-5EAF-7CEA-BF76-3B9365AED698}"/>
+                <a16:creationId xmlns:a16="http://schemas.microsoft.com/office/drawing/2014/main" id="{585BBA4F-AC3D-AC68-6162-E0F999A8794B}"/>
               </a:ext>
             </a:extLst>
           </p:cNvPr>
@@ -5065,14 +5067,55 @@
           <a:bodyPr/>
           <a:lstStyle/>
           <a:p>
-            <a:endParaRPr lang="en-US"/>
+            <a:r>
+              <a:rPr lang="en-US" dirty="0"/>
+              <a:t>Model Selection: </a:t>
+            </a:r>
+            <a:r>
+              <a:rPr lang="en-US" dirty="0" err="1"/>
+              <a:t>LogReg</a:t>
+            </a:r>
+            <a:endParaRPr lang="en-US" dirty="0"/>
+          </a:p>
+          <a:p>
+            <a:pPr lvl="1"/>
+            <a:r>
+              <a:rPr lang="en-US" dirty="0" err="1"/>
+              <a:t>StratifiedKFold</a:t>
+            </a:r>
+            <a:r>
+              <a:rPr lang="en-US" dirty="0"/>
+              <a:t> CV used to determine best model</a:t>
+            </a:r>
+          </a:p>
+          <a:p>
+            <a:pPr lvl="1"/>
+            <a:r>
+              <a:rPr lang="en-US" dirty="0" err="1"/>
+              <a:t>StandardScalar</a:t>
+            </a:r>
+            <a:r>
+              <a:rPr lang="en-US" dirty="0"/>
+              <a:t> used to normalize data</a:t>
+            </a:r>
+          </a:p>
+          <a:p>
+            <a:pPr lvl="1"/>
+            <a:r>
+              <a:rPr lang="en-US" dirty="0" err="1"/>
+              <a:t>SelectKBest</a:t>
+            </a:r>
+            <a:r>
+              <a:rPr lang="en-US" dirty="0"/>
+              <a:t> used to reduce dimensionality</a:t>
+            </a:r>
           </a:p>
         </p:txBody>
       </p:sp>
     </p:spTree>
     <p:extLst>
       <p:ext uri="{BB962C8B-B14F-4D97-AF65-F5344CB8AC3E}">
-        <p14:creationId xmlns:p14="http://schemas.microsoft.com/office/powerpoint/2010/main" val="700886777"/>
+        <p14:creationId xmlns:p14="http://schemas.microsoft.com/office/powerpoint/2010/main" val="185969209"/>
       </p:ext>
     </p:extLst>
   </p:cSld>
@@ -5104,7 +5147,7 @@
           <p:cNvPr id="2" name="Title 1">
             <a:extLst>
               <a:ext uri="{FF2B5EF4-FFF2-40B4-BE49-F238E27FC236}">
-                <a16:creationId xmlns:a16="http://schemas.microsoft.com/office/drawing/2014/main" id="{68F4FC0C-A23E-D74B-F1DF-5D461D21668D}"/>
+                <a16:creationId xmlns:a16="http://schemas.microsoft.com/office/drawing/2014/main" id="{64AD0586-234F-A455-C049-C953A2065E61}"/>
               </a:ext>
             </a:extLst>
           </p:cNvPr>
@@ -5122,7 +5165,7 @@
           <a:p>
             <a:r>
               <a:rPr lang="en-US" dirty="0"/>
-              <a:t>Part 2 – Traditional</a:t>
+              <a:t>Part 2 – Deep Learning</a:t>
             </a:r>
           </a:p>
         </p:txBody>
@@ -5132,7 +5175,7 @@
           <p:cNvPr id="3" name="Content Placeholder 2">
             <a:extLst>
               <a:ext uri="{FF2B5EF4-FFF2-40B4-BE49-F238E27FC236}">
-                <a16:creationId xmlns:a16="http://schemas.microsoft.com/office/drawing/2014/main" id="{585BBA4F-AC3D-AC68-6162-E0F999A8794B}"/>
+                <a16:creationId xmlns:a16="http://schemas.microsoft.com/office/drawing/2014/main" id="{561478C8-F244-57BA-FCE1-BB7325332BFE}"/>
               </a:ext>
             </a:extLst>
           </p:cNvPr>
@@ -5148,94 +5191,79 @@
           <a:bodyPr/>
           <a:lstStyle/>
           <a:p>
-            <a:endParaRPr lang="en-US"/>
-          </a:p>
-        </p:txBody>
-      </p:sp>
-    </p:spTree>
-    <p:extLst>
-      <p:ext uri="{BB962C8B-B14F-4D97-AF65-F5344CB8AC3E}">
-        <p14:creationId xmlns:p14="http://schemas.microsoft.com/office/powerpoint/2010/main" val="185969209"/>
-      </p:ext>
-    </p:extLst>
-  </p:cSld>
-  <p:clrMapOvr>
-    <a:masterClrMapping/>
-  </p:clrMapOvr>
-</p:sld>
-</file>
-
-<file path=ppt/slides/slide6.xml><?xml version="1.0" encoding="utf-8"?>
-<p:sld xmlns:a="http://schemas.openxmlformats.org/drawingml/2006/main" xmlns:r="http://schemas.openxmlformats.org/officeDocument/2006/relationships" xmlns:p="http://schemas.openxmlformats.org/presentationml/2006/main">
-  <p:cSld>
-    <p:spTree>
-      <p:nvGrpSpPr>
-        <p:cNvPr id="1" name=""/>
-        <p:cNvGrpSpPr/>
-        <p:nvPr/>
-      </p:nvGrpSpPr>
-      <p:grpSpPr>
-        <a:xfrm>
-          <a:off x="0" y="0"/>
-          <a:ext cx="0" cy="0"/>
-          <a:chOff x="0" y="0"/>
-          <a:chExt cx="0" cy="0"/>
-        </a:xfrm>
-      </p:grpSpPr>
-      <p:sp>
-        <p:nvSpPr>
-          <p:cNvPr id="2" name="Title 1">
-            <a:extLst>
-              <a:ext uri="{FF2B5EF4-FFF2-40B4-BE49-F238E27FC236}">
-                <a16:creationId xmlns:a16="http://schemas.microsoft.com/office/drawing/2014/main" id="{64AD0586-234F-A455-C049-C953A2065E61}"/>
-              </a:ext>
-            </a:extLst>
-          </p:cNvPr>
-          <p:cNvSpPr>
-            <a:spLocks noGrp="1"/>
-          </p:cNvSpPr>
-          <p:nvPr>
-            <p:ph type="title"/>
-          </p:nvPr>
-        </p:nvSpPr>
-        <p:spPr/>
-        <p:txBody>
-          <a:bodyPr/>
-          <a:lstStyle/>
-          <a:p>
             <a:r>
               <a:rPr lang="en-US" dirty="0"/>
-              <a:t>Part 2 – </a:t>
-            </a:r>
-            <a:r>
-              <a:rPr lang="en-US"/>
-              <a:t>Deep Learning</a:t>
-            </a:r>
-          </a:p>
-        </p:txBody>
-      </p:sp>
-      <p:sp>
-        <p:nvSpPr>
-          <p:cNvPr id="3" name="Content Placeholder 2">
-            <a:extLst>
-              <a:ext uri="{FF2B5EF4-FFF2-40B4-BE49-F238E27FC236}">
-                <a16:creationId xmlns:a16="http://schemas.microsoft.com/office/drawing/2014/main" id="{561478C8-F244-57BA-FCE1-BB7325332BFE}"/>
-              </a:ext>
-            </a:extLst>
-          </p:cNvPr>
-          <p:cNvSpPr>
-            <a:spLocks noGrp="1"/>
-          </p:cNvSpPr>
-          <p:nvPr>
-            <p:ph idx="1"/>
-          </p:nvPr>
-        </p:nvSpPr>
-        <p:spPr/>
-        <p:txBody>
-          <a:bodyPr/>
-          <a:lstStyle/>
-          <a:p>
-            <a:endParaRPr lang="en-US"/>
+              <a:t>Model Selection: MLP</a:t>
+            </a:r>
+          </a:p>
+          <a:p>
+            <a:pPr lvl="1"/>
+            <a:r>
+              <a:rPr lang="en-US" dirty="0" err="1"/>
+              <a:t>RepeatedStratifiedKFold</a:t>
+            </a:r>
+            <a:r>
+              <a:rPr lang="en-US" dirty="0"/>
+              <a:t> CV used to determine hyperparameters</a:t>
+            </a:r>
+          </a:p>
+          <a:p>
+            <a:pPr lvl="1"/>
+            <a:r>
+              <a:rPr lang="en-US" dirty="0" err="1"/>
+              <a:t>StandardScalar</a:t>
+            </a:r>
+            <a:r>
+              <a:rPr lang="en-US" dirty="0"/>
+              <a:t> used to normalize data</a:t>
+            </a:r>
+          </a:p>
+          <a:p>
+            <a:pPr lvl="1"/>
+            <a:r>
+              <a:rPr lang="en-US" dirty="0" err="1"/>
+              <a:t>SelectKBest</a:t>
+            </a:r>
+            <a:r>
+              <a:rPr lang="en-US" dirty="0"/>
+              <a:t> used to reduce dimensionality</a:t>
+            </a:r>
+          </a:p>
+          <a:p>
+            <a:pPr lvl="1"/>
+            <a:r>
+              <a:rPr lang="en-US" dirty="0" err="1"/>
+              <a:t>ReLU</a:t>
+            </a:r>
+            <a:r>
+              <a:rPr lang="en-US" dirty="0"/>
+              <a:t> with 0.25 dropout</a:t>
+            </a:r>
+          </a:p>
+          <a:p>
+            <a:pPr lvl="1"/>
+            <a:r>
+              <a:rPr lang="en-US" dirty="0" err="1"/>
+              <a:t>BatchNorm</a:t>
+            </a:r>
+            <a:r>
+              <a:rPr lang="en-US" dirty="0"/>
+              <a:t> used to normalize activations</a:t>
+            </a:r>
+          </a:p>
+          <a:p>
+            <a:pPr lvl="1"/>
+            <a:r>
+              <a:rPr lang="en-US" dirty="0" err="1"/>
+              <a:t>BCEWithLogitsLoss</a:t>
+            </a:r>
+            <a:r>
+              <a:rPr lang="en-US" dirty="0"/>
+              <a:t> used to measure error</a:t>
+            </a:r>
+          </a:p>
+          <a:p>
+            <a:endParaRPr lang="en-US" dirty="0"/>
           </a:p>
         </p:txBody>
       </p:sp>
@@ -5252,7 +5280,7 @@
 </p:sld>
 </file>
 
-<file path=ppt/slides/slide7.xml><?xml version="1.0" encoding="utf-8"?>
+<file path=ppt/slides/slide6.xml><?xml version="1.0" encoding="utf-8"?>
 <p:sld xmlns:a="http://schemas.openxmlformats.org/drawingml/2006/main" xmlns:r="http://schemas.openxmlformats.org/officeDocument/2006/relationships" xmlns:p="http://schemas.openxmlformats.org/presentationml/2006/main">
   <p:cSld>
     <p:bg>
@@ -5440,14 +5468,17 @@
           <a:lstStyle/>
           <a:p>
             <a:pPr algn="r"/>
-            <a:endParaRPr lang="en-US" sz="7200" b="1" i="0" kern="1200" cap="all" baseline="0">
-              <a:solidFill>
-                <a:schemeClr val="bg1"/>
-              </a:solidFill>
-              <a:latin typeface="+mj-lt"/>
-              <a:ea typeface="+mj-ea"/>
-              <a:cs typeface="+mj-cs"/>
-            </a:endParaRPr>
+            <a:r>
+              <a:rPr lang="en-US" sz="7200" b="1" i="0" kern="1200" cap="all" baseline="0" dirty="0">
+                <a:solidFill>
+                  <a:schemeClr val="bg1"/>
+                </a:solidFill>
+                <a:latin typeface="+mj-lt"/>
+                <a:ea typeface="+mj-ea"/>
+                <a:cs typeface="+mj-cs"/>
+              </a:rPr>
+              <a:t>Thank You</a:t>
+            </a:r>
           </a:p>
         </p:txBody>
       </p:sp>

--- a/Documentation/Final Presentation.pptx
+++ b/Documentation/Final Presentation.pptx
@@ -8,9 +8,11 @@
     <p:sldId id="256" r:id="rId2"/>
     <p:sldId id="257" r:id="rId3"/>
     <p:sldId id="262" r:id="rId4"/>
-    <p:sldId id="259" r:id="rId5"/>
-    <p:sldId id="260" r:id="rId6"/>
-    <p:sldId id="261" r:id="rId7"/>
+    <p:sldId id="263" r:id="rId5"/>
+    <p:sldId id="259" r:id="rId6"/>
+    <p:sldId id="260" r:id="rId7"/>
+    <p:sldId id="264" r:id="rId8"/>
+    <p:sldId id="261" r:id="rId9"/>
   </p:sldIdLst>
   <p:sldSz cx="12192000" cy="6858000"/>
   <p:notesSz cx="6858000" cy="9144000"/>
@@ -109,6 +111,11 @@
       </a:defRPr>
     </a:lvl9pPr>
   </p:defaultTextStyle>
+  <p:extLst>
+    <p:ext uri="{EFAFB233-063F-42B5-8137-9DF3F51BA10A}">
+      <p15:sldGuideLst xmlns:p15="http://schemas.microsoft.com/office/powerpoint/2012/main"/>
+    </p:ext>
+  </p:extLst>
 </p:presentation>
 </file>
 
@@ -4875,7 +4882,7 @@
           <a:p>
             <a:r>
               <a:rPr lang="en-US" dirty="0"/>
-              <a:t>Part 1 – Traditional </a:t>
+              <a:t>Part 1 – Approach </a:t>
             </a:r>
           </a:p>
         </p:txBody>
@@ -4958,7 +4965,7 @@
           <a:p>
             <a:r>
               <a:rPr lang="en-US" dirty="0"/>
-              <a:t>Part 1 – Deep Learning</a:t>
+              <a:t>Part 1 – Results</a:t>
             </a:r>
           </a:p>
         </p:txBody>
@@ -5023,7 +5030,7 @@
           <p:cNvPr id="2" name="Title 1">
             <a:extLst>
               <a:ext uri="{FF2B5EF4-FFF2-40B4-BE49-F238E27FC236}">
-                <a16:creationId xmlns:a16="http://schemas.microsoft.com/office/drawing/2014/main" id="{68F4FC0C-A23E-D74B-F1DF-5D461D21668D}"/>
+                <a16:creationId xmlns:a16="http://schemas.microsoft.com/office/drawing/2014/main" id="{ED040810-D060-8C4E-8BAA-E64C6833A0AB}"/>
               </a:ext>
             </a:extLst>
           </p:cNvPr>
@@ -5041,7 +5048,7 @@
           <a:p>
             <a:r>
               <a:rPr lang="en-US" dirty="0"/>
-              <a:t>Part 2 – Traditional</a:t>
+              <a:t>Part 1 – Conclusion</a:t>
             </a:r>
           </a:p>
         </p:txBody>
@@ -5051,7 +5058,7 @@
           <p:cNvPr id="3" name="Content Placeholder 2">
             <a:extLst>
               <a:ext uri="{FF2B5EF4-FFF2-40B4-BE49-F238E27FC236}">
-                <a16:creationId xmlns:a16="http://schemas.microsoft.com/office/drawing/2014/main" id="{585BBA4F-AC3D-AC68-6162-E0F999A8794B}"/>
+                <a16:creationId xmlns:a16="http://schemas.microsoft.com/office/drawing/2014/main" id="{1A3E2549-1EBC-B27D-5B4C-56123FFE165B}"/>
               </a:ext>
             </a:extLst>
           </p:cNvPr>
@@ -5067,55 +5074,14 @@
           <a:bodyPr/>
           <a:lstStyle/>
           <a:p>
-            <a:r>
-              <a:rPr lang="en-US" dirty="0"/>
-              <a:t>Model Selection: </a:t>
-            </a:r>
-            <a:r>
-              <a:rPr lang="en-US" dirty="0" err="1"/>
-              <a:t>LogReg</a:t>
-            </a:r>
-            <a:endParaRPr lang="en-US" dirty="0"/>
-          </a:p>
-          <a:p>
-            <a:pPr lvl="1"/>
-            <a:r>
-              <a:rPr lang="en-US" dirty="0" err="1"/>
-              <a:t>StratifiedKFold</a:t>
-            </a:r>
-            <a:r>
-              <a:rPr lang="en-US" dirty="0"/>
-              <a:t> CV used to determine best model</a:t>
-            </a:r>
-          </a:p>
-          <a:p>
-            <a:pPr lvl="1"/>
-            <a:r>
-              <a:rPr lang="en-US" dirty="0" err="1"/>
-              <a:t>StandardScalar</a:t>
-            </a:r>
-            <a:r>
-              <a:rPr lang="en-US" dirty="0"/>
-              <a:t> used to normalize data</a:t>
-            </a:r>
-          </a:p>
-          <a:p>
-            <a:pPr lvl="1"/>
-            <a:r>
-              <a:rPr lang="en-US" dirty="0" err="1"/>
-              <a:t>SelectKBest</a:t>
-            </a:r>
-            <a:r>
-              <a:rPr lang="en-US" dirty="0"/>
-              <a:t> used to reduce dimensionality</a:t>
-            </a:r>
+            <a:endParaRPr lang="en-US"/>
           </a:p>
         </p:txBody>
       </p:sp>
     </p:spTree>
     <p:extLst>
       <p:ext uri="{BB962C8B-B14F-4D97-AF65-F5344CB8AC3E}">
-        <p14:creationId xmlns:p14="http://schemas.microsoft.com/office/powerpoint/2010/main" val="185969209"/>
+        <p14:creationId xmlns:p14="http://schemas.microsoft.com/office/powerpoint/2010/main" val="2822892622"/>
       </p:ext>
     </p:extLst>
   </p:cSld>
@@ -5147,7 +5113,7 @@
           <p:cNvPr id="2" name="Title 1">
             <a:extLst>
               <a:ext uri="{FF2B5EF4-FFF2-40B4-BE49-F238E27FC236}">
-                <a16:creationId xmlns:a16="http://schemas.microsoft.com/office/drawing/2014/main" id="{64AD0586-234F-A455-C049-C953A2065E61}"/>
+                <a16:creationId xmlns:a16="http://schemas.microsoft.com/office/drawing/2014/main" id="{68F4FC0C-A23E-D74B-F1DF-5D461D21668D}"/>
               </a:ext>
             </a:extLst>
           </p:cNvPr>
@@ -5165,7 +5131,7 @@
           <a:p>
             <a:r>
               <a:rPr lang="en-US" dirty="0"/>
-              <a:t>Part 2 – Deep Learning</a:t>
+              <a:t>Part 2 – Approach</a:t>
             </a:r>
           </a:p>
         </p:txBody>
@@ -5175,7 +5141,7 @@
           <p:cNvPr id="3" name="Content Placeholder 2">
             <a:extLst>
               <a:ext uri="{FF2B5EF4-FFF2-40B4-BE49-F238E27FC236}">
-                <a16:creationId xmlns:a16="http://schemas.microsoft.com/office/drawing/2014/main" id="{561478C8-F244-57BA-FCE1-BB7325332BFE}"/>
+                <a16:creationId xmlns:a16="http://schemas.microsoft.com/office/drawing/2014/main" id="{585BBA4F-AC3D-AC68-6162-E0F999A8794B}"/>
               </a:ext>
             </a:extLst>
           </p:cNvPr>
@@ -5188,12 +5154,62 @@
         </p:nvSpPr>
         <p:spPr/>
         <p:txBody>
-          <a:bodyPr/>
+          <a:bodyPr>
+            <a:normAutofit fontScale="92500" lnSpcReduction="20000"/>
+          </a:bodyPr>
           <a:lstStyle/>
           <a:p>
             <a:r>
               <a:rPr lang="en-US" dirty="0"/>
-              <a:t>Model Selection: MLP</a:t>
+              <a:t>Model Selection (Traditional): </a:t>
+            </a:r>
+            <a:r>
+              <a:rPr lang="en-US" dirty="0" err="1"/>
+              <a:t>LogReg</a:t>
+            </a:r>
+            <a:endParaRPr lang="en-US" dirty="0"/>
+          </a:p>
+          <a:p>
+            <a:pPr lvl="1"/>
+            <a:r>
+              <a:rPr lang="en-US" dirty="0" err="1"/>
+              <a:t>StratifiedKFold</a:t>
+            </a:r>
+            <a:r>
+              <a:rPr lang="en-US" dirty="0"/>
+              <a:t> CV used to determine best model</a:t>
+            </a:r>
+          </a:p>
+          <a:p>
+            <a:pPr lvl="1"/>
+            <a:r>
+              <a:rPr lang="en-US" dirty="0" err="1"/>
+              <a:t>StandardScalar</a:t>
+            </a:r>
+            <a:r>
+              <a:rPr lang="en-US" dirty="0"/>
+              <a:t> used to normalize data</a:t>
+            </a:r>
+          </a:p>
+          <a:p>
+            <a:pPr lvl="1"/>
+            <a:r>
+              <a:rPr lang="en-US" dirty="0" err="1"/>
+              <a:t>SelectKBest</a:t>
+            </a:r>
+            <a:r>
+              <a:rPr lang="en-US" dirty="0"/>
+              <a:t> used to reduce dimensionality</a:t>
+            </a:r>
+          </a:p>
+          <a:p>
+            <a:pPr lvl="1"/>
+            <a:endParaRPr lang="en-US" dirty="0"/>
+          </a:p>
+          <a:p>
+            <a:r>
+              <a:rPr lang="en-US" dirty="0"/>
+              <a:t>Model Selection (Deep Learning): MLP</a:t>
             </a:r>
           </a:p>
           <a:p>
@@ -5262,6 +5278,89 @@
               <a:t> used to measure error</a:t>
             </a:r>
           </a:p>
+          <a:p>
+            <a:endParaRPr lang="en-US" dirty="0"/>
+          </a:p>
+        </p:txBody>
+      </p:sp>
+    </p:spTree>
+    <p:extLst>
+      <p:ext uri="{BB962C8B-B14F-4D97-AF65-F5344CB8AC3E}">
+        <p14:creationId xmlns:p14="http://schemas.microsoft.com/office/powerpoint/2010/main" val="185969209"/>
+      </p:ext>
+    </p:extLst>
+  </p:cSld>
+  <p:clrMapOvr>
+    <a:masterClrMapping/>
+  </p:clrMapOvr>
+</p:sld>
+</file>
+
+<file path=ppt/slides/slide6.xml><?xml version="1.0" encoding="utf-8"?>
+<p:sld xmlns:a="http://schemas.openxmlformats.org/drawingml/2006/main" xmlns:r="http://schemas.openxmlformats.org/officeDocument/2006/relationships" xmlns:p="http://schemas.openxmlformats.org/presentationml/2006/main">
+  <p:cSld>
+    <p:spTree>
+      <p:nvGrpSpPr>
+        <p:cNvPr id="1" name=""/>
+        <p:cNvGrpSpPr/>
+        <p:nvPr/>
+      </p:nvGrpSpPr>
+      <p:grpSpPr>
+        <a:xfrm>
+          <a:off x="0" y="0"/>
+          <a:ext cx="0" cy="0"/>
+          <a:chOff x="0" y="0"/>
+          <a:chExt cx="0" cy="0"/>
+        </a:xfrm>
+      </p:grpSpPr>
+      <p:sp>
+        <p:nvSpPr>
+          <p:cNvPr id="2" name="Title 1">
+            <a:extLst>
+              <a:ext uri="{FF2B5EF4-FFF2-40B4-BE49-F238E27FC236}">
+                <a16:creationId xmlns:a16="http://schemas.microsoft.com/office/drawing/2014/main" id="{64AD0586-234F-A455-C049-C953A2065E61}"/>
+              </a:ext>
+            </a:extLst>
+          </p:cNvPr>
+          <p:cNvSpPr>
+            <a:spLocks noGrp="1"/>
+          </p:cNvSpPr>
+          <p:nvPr>
+            <p:ph type="title"/>
+          </p:nvPr>
+        </p:nvSpPr>
+        <p:spPr/>
+        <p:txBody>
+          <a:bodyPr/>
+          <a:lstStyle/>
+          <a:p>
+            <a:r>
+              <a:rPr lang="en-US" dirty="0"/>
+              <a:t>Part 2 – Results</a:t>
+            </a:r>
+          </a:p>
+        </p:txBody>
+      </p:sp>
+      <p:sp>
+        <p:nvSpPr>
+          <p:cNvPr id="3" name="Content Placeholder 2">
+            <a:extLst>
+              <a:ext uri="{FF2B5EF4-FFF2-40B4-BE49-F238E27FC236}">
+                <a16:creationId xmlns:a16="http://schemas.microsoft.com/office/drawing/2014/main" id="{561478C8-F244-57BA-FCE1-BB7325332BFE}"/>
+              </a:ext>
+            </a:extLst>
+          </p:cNvPr>
+          <p:cNvSpPr>
+            <a:spLocks noGrp="1"/>
+          </p:cNvSpPr>
+          <p:nvPr>
+            <p:ph idx="1"/>
+          </p:nvPr>
+        </p:nvSpPr>
+        <p:spPr/>
+        <p:txBody>
+          <a:bodyPr/>
+          <a:lstStyle/>
           <a:p>
             <a:endParaRPr lang="en-US" dirty="0"/>
           </a:p>
@@ -5280,7 +5379,94 @@
 </p:sld>
 </file>
 
-<file path=ppt/slides/slide6.xml><?xml version="1.0" encoding="utf-8"?>
+<file path=ppt/slides/slide7.xml><?xml version="1.0" encoding="utf-8"?>
+<p:sld xmlns:a="http://schemas.openxmlformats.org/drawingml/2006/main" xmlns:r="http://schemas.openxmlformats.org/officeDocument/2006/relationships" xmlns:p="http://schemas.openxmlformats.org/presentationml/2006/main">
+  <p:cSld>
+    <p:spTree>
+      <p:nvGrpSpPr>
+        <p:cNvPr id="1" name=""/>
+        <p:cNvGrpSpPr/>
+        <p:nvPr/>
+      </p:nvGrpSpPr>
+      <p:grpSpPr>
+        <a:xfrm>
+          <a:off x="0" y="0"/>
+          <a:ext cx="0" cy="0"/>
+          <a:chOff x="0" y="0"/>
+          <a:chExt cx="0" cy="0"/>
+        </a:xfrm>
+      </p:grpSpPr>
+      <p:sp>
+        <p:nvSpPr>
+          <p:cNvPr id="2" name="Title 1">
+            <a:extLst>
+              <a:ext uri="{FF2B5EF4-FFF2-40B4-BE49-F238E27FC236}">
+                <a16:creationId xmlns:a16="http://schemas.microsoft.com/office/drawing/2014/main" id="{804B22E2-45CD-80E4-43BD-6E3DC616A6BA}"/>
+              </a:ext>
+            </a:extLst>
+          </p:cNvPr>
+          <p:cNvSpPr>
+            <a:spLocks noGrp="1"/>
+          </p:cNvSpPr>
+          <p:nvPr>
+            <p:ph type="title"/>
+          </p:nvPr>
+        </p:nvSpPr>
+        <p:spPr/>
+        <p:txBody>
+          <a:bodyPr/>
+          <a:lstStyle/>
+          <a:p>
+            <a:r>
+              <a:rPr lang="en-US" dirty="0"/>
+              <a:t>Part </a:t>
+            </a:r>
+            <a:r>
+              <a:rPr lang="en-US"/>
+              <a:t>2 – Conclusion</a:t>
+            </a:r>
+          </a:p>
+        </p:txBody>
+      </p:sp>
+      <p:sp>
+        <p:nvSpPr>
+          <p:cNvPr id="3" name="Content Placeholder 2">
+            <a:extLst>
+              <a:ext uri="{FF2B5EF4-FFF2-40B4-BE49-F238E27FC236}">
+                <a16:creationId xmlns:a16="http://schemas.microsoft.com/office/drawing/2014/main" id="{9A469714-4927-D2FD-DF64-9AC206900752}"/>
+              </a:ext>
+            </a:extLst>
+          </p:cNvPr>
+          <p:cNvSpPr>
+            <a:spLocks noGrp="1"/>
+          </p:cNvSpPr>
+          <p:nvPr>
+            <p:ph idx="1"/>
+          </p:nvPr>
+        </p:nvSpPr>
+        <p:spPr/>
+        <p:txBody>
+          <a:bodyPr/>
+          <a:lstStyle/>
+          <a:p>
+            <a:endParaRPr lang="en-US"/>
+          </a:p>
+        </p:txBody>
+      </p:sp>
+    </p:spTree>
+    <p:extLst>
+      <p:ext uri="{BB962C8B-B14F-4D97-AF65-F5344CB8AC3E}">
+        <p14:creationId xmlns:p14="http://schemas.microsoft.com/office/powerpoint/2010/main" val="1077775097"/>
+      </p:ext>
+    </p:extLst>
+  </p:cSld>
+  <p:clrMapOvr>
+    <a:masterClrMapping/>
+  </p:clrMapOvr>
+</p:sld>
+</file>
+
+<file path=ppt/slides/slide8.xml><?xml version="1.0" encoding="utf-8"?>
 <p:sld xmlns:a="http://schemas.openxmlformats.org/drawingml/2006/main" xmlns:r="http://schemas.openxmlformats.org/officeDocument/2006/relationships" xmlns:p="http://schemas.openxmlformats.org/presentationml/2006/main">
   <p:cSld>
     <p:bg>

--- a/Documentation/Final Presentation.pptx
+++ b/Documentation/Final Presentation.pptx
@@ -8,11 +8,13 @@
     <p:sldId id="256" r:id="rId2"/>
     <p:sldId id="257" r:id="rId3"/>
     <p:sldId id="262" r:id="rId4"/>
-    <p:sldId id="263" r:id="rId5"/>
-    <p:sldId id="259" r:id="rId6"/>
-    <p:sldId id="260" r:id="rId7"/>
-    <p:sldId id="264" r:id="rId8"/>
-    <p:sldId id="261" r:id="rId9"/>
+    <p:sldId id="265" r:id="rId5"/>
+    <p:sldId id="266" r:id="rId6"/>
+    <p:sldId id="263" r:id="rId7"/>
+    <p:sldId id="259" r:id="rId8"/>
+    <p:sldId id="260" r:id="rId9"/>
+    <p:sldId id="264" r:id="rId10"/>
+    <p:sldId id="261" r:id="rId11"/>
   </p:sldIdLst>
   <p:sldSz cx="12192000" cy="6858000"/>
   <p:notesSz cx="6858000" cy="9144000"/>
@@ -4842,631 +4844,7 @@
 </p:sld>
 </file>
 
-<file path=ppt/slides/slide2.xml><?xml version="1.0" encoding="utf-8"?>
-<p:sld xmlns:a="http://schemas.openxmlformats.org/drawingml/2006/main" xmlns:r="http://schemas.openxmlformats.org/officeDocument/2006/relationships" xmlns:p="http://schemas.openxmlformats.org/presentationml/2006/main">
-  <p:cSld>
-    <p:spTree>
-      <p:nvGrpSpPr>
-        <p:cNvPr id="1" name=""/>
-        <p:cNvGrpSpPr/>
-        <p:nvPr/>
-      </p:nvGrpSpPr>
-      <p:grpSpPr>
-        <a:xfrm>
-          <a:off x="0" y="0"/>
-          <a:ext cx="0" cy="0"/>
-          <a:chOff x="0" y="0"/>
-          <a:chExt cx="0" cy="0"/>
-        </a:xfrm>
-      </p:grpSpPr>
-      <p:sp>
-        <p:nvSpPr>
-          <p:cNvPr id="2" name="Title 1">
-            <a:extLst>
-              <a:ext uri="{FF2B5EF4-FFF2-40B4-BE49-F238E27FC236}">
-                <a16:creationId xmlns:a16="http://schemas.microsoft.com/office/drawing/2014/main" id="{16EDB5F4-3BF6-497A-48FF-017CB1559176}"/>
-              </a:ext>
-            </a:extLst>
-          </p:cNvPr>
-          <p:cNvSpPr>
-            <a:spLocks noGrp="1"/>
-          </p:cNvSpPr>
-          <p:nvPr>
-            <p:ph type="title"/>
-          </p:nvPr>
-        </p:nvSpPr>
-        <p:spPr/>
-        <p:txBody>
-          <a:bodyPr/>
-          <a:lstStyle/>
-          <a:p>
-            <a:r>
-              <a:rPr lang="en-US" dirty="0"/>
-              <a:t>Part 1 – Approach </a:t>
-            </a:r>
-          </a:p>
-        </p:txBody>
-      </p:sp>
-      <p:sp>
-        <p:nvSpPr>
-          <p:cNvPr id="3" name="Content Placeholder 2">
-            <a:extLst>
-              <a:ext uri="{FF2B5EF4-FFF2-40B4-BE49-F238E27FC236}">
-                <a16:creationId xmlns:a16="http://schemas.microsoft.com/office/drawing/2014/main" id="{901B5B7B-EE18-EB6F-E7AD-6D5F1DEC6953}"/>
-              </a:ext>
-            </a:extLst>
-          </p:cNvPr>
-          <p:cNvSpPr>
-            <a:spLocks noGrp="1"/>
-          </p:cNvSpPr>
-          <p:nvPr>
-            <p:ph idx="1"/>
-          </p:nvPr>
-        </p:nvSpPr>
-        <p:spPr/>
-        <p:txBody>
-          <a:bodyPr/>
-          <a:lstStyle/>
-          <a:p>
-            <a:endParaRPr lang="en-US" dirty="0"/>
-          </a:p>
-        </p:txBody>
-      </p:sp>
-    </p:spTree>
-    <p:extLst>
-      <p:ext uri="{BB962C8B-B14F-4D97-AF65-F5344CB8AC3E}">
-        <p14:creationId xmlns:p14="http://schemas.microsoft.com/office/powerpoint/2010/main" val="3583789835"/>
-      </p:ext>
-    </p:extLst>
-  </p:cSld>
-  <p:clrMapOvr>
-    <a:masterClrMapping/>
-  </p:clrMapOvr>
-</p:sld>
-</file>
-
-<file path=ppt/slides/slide3.xml><?xml version="1.0" encoding="utf-8"?>
-<p:sld xmlns:a="http://schemas.openxmlformats.org/drawingml/2006/main" xmlns:r="http://schemas.openxmlformats.org/officeDocument/2006/relationships" xmlns:p="http://schemas.openxmlformats.org/presentationml/2006/main">
-  <p:cSld>
-    <p:spTree>
-      <p:nvGrpSpPr>
-        <p:cNvPr id="1" name=""/>
-        <p:cNvGrpSpPr/>
-        <p:nvPr/>
-      </p:nvGrpSpPr>
-      <p:grpSpPr>
-        <a:xfrm>
-          <a:off x="0" y="0"/>
-          <a:ext cx="0" cy="0"/>
-          <a:chOff x="0" y="0"/>
-          <a:chExt cx="0" cy="0"/>
-        </a:xfrm>
-      </p:grpSpPr>
-      <p:sp>
-        <p:nvSpPr>
-          <p:cNvPr id="2" name="Title 1">
-            <a:extLst>
-              <a:ext uri="{FF2B5EF4-FFF2-40B4-BE49-F238E27FC236}">
-                <a16:creationId xmlns:a16="http://schemas.microsoft.com/office/drawing/2014/main" id="{BECEAD95-E2F3-1454-3809-832098E09252}"/>
-              </a:ext>
-            </a:extLst>
-          </p:cNvPr>
-          <p:cNvSpPr>
-            <a:spLocks noGrp="1"/>
-          </p:cNvSpPr>
-          <p:nvPr>
-            <p:ph type="title"/>
-          </p:nvPr>
-        </p:nvSpPr>
-        <p:spPr/>
-        <p:txBody>
-          <a:bodyPr/>
-          <a:lstStyle/>
-          <a:p>
-            <a:r>
-              <a:rPr lang="en-US" dirty="0"/>
-              <a:t>Part 1 – Results</a:t>
-            </a:r>
-          </a:p>
-        </p:txBody>
-      </p:sp>
-      <p:sp>
-        <p:nvSpPr>
-          <p:cNvPr id="3" name="Content Placeholder 2">
-            <a:extLst>
-              <a:ext uri="{FF2B5EF4-FFF2-40B4-BE49-F238E27FC236}">
-                <a16:creationId xmlns:a16="http://schemas.microsoft.com/office/drawing/2014/main" id="{9977B685-5EAF-7CEA-BF76-3B9365AED698}"/>
-              </a:ext>
-            </a:extLst>
-          </p:cNvPr>
-          <p:cNvSpPr>
-            <a:spLocks noGrp="1"/>
-          </p:cNvSpPr>
-          <p:nvPr>
-            <p:ph idx="1"/>
-          </p:nvPr>
-        </p:nvSpPr>
-        <p:spPr/>
-        <p:txBody>
-          <a:bodyPr/>
-          <a:lstStyle/>
-          <a:p>
-            <a:endParaRPr lang="en-US"/>
-          </a:p>
-        </p:txBody>
-      </p:sp>
-    </p:spTree>
-    <p:extLst>
-      <p:ext uri="{BB962C8B-B14F-4D97-AF65-F5344CB8AC3E}">
-        <p14:creationId xmlns:p14="http://schemas.microsoft.com/office/powerpoint/2010/main" val="700886777"/>
-      </p:ext>
-    </p:extLst>
-  </p:cSld>
-  <p:clrMapOvr>
-    <a:masterClrMapping/>
-  </p:clrMapOvr>
-</p:sld>
-</file>
-
-<file path=ppt/slides/slide4.xml><?xml version="1.0" encoding="utf-8"?>
-<p:sld xmlns:a="http://schemas.openxmlformats.org/drawingml/2006/main" xmlns:r="http://schemas.openxmlformats.org/officeDocument/2006/relationships" xmlns:p="http://schemas.openxmlformats.org/presentationml/2006/main">
-  <p:cSld>
-    <p:spTree>
-      <p:nvGrpSpPr>
-        <p:cNvPr id="1" name=""/>
-        <p:cNvGrpSpPr/>
-        <p:nvPr/>
-      </p:nvGrpSpPr>
-      <p:grpSpPr>
-        <a:xfrm>
-          <a:off x="0" y="0"/>
-          <a:ext cx="0" cy="0"/>
-          <a:chOff x="0" y="0"/>
-          <a:chExt cx="0" cy="0"/>
-        </a:xfrm>
-      </p:grpSpPr>
-      <p:sp>
-        <p:nvSpPr>
-          <p:cNvPr id="2" name="Title 1">
-            <a:extLst>
-              <a:ext uri="{FF2B5EF4-FFF2-40B4-BE49-F238E27FC236}">
-                <a16:creationId xmlns:a16="http://schemas.microsoft.com/office/drawing/2014/main" id="{ED040810-D060-8C4E-8BAA-E64C6833A0AB}"/>
-              </a:ext>
-            </a:extLst>
-          </p:cNvPr>
-          <p:cNvSpPr>
-            <a:spLocks noGrp="1"/>
-          </p:cNvSpPr>
-          <p:nvPr>
-            <p:ph type="title"/>
-          </p:nvPr>
-        </p:nvSpPr>
-        <p:spPr/>
-        <p:txBody>
-          <a:bodyPr/>
-          <a:lstStyle/>
-          <a:p>
-            <a:r>
-              <a:rPr lang="en-US" dirty="0"/>
-              <a:t>Part 1 – Conclusion</a:t>
-            </a:r>
-          </a:p>
-        </p:txBody>
-      </p:sp>
-      <p:sp>
-        <p:nvSpPr>
-          <p:cNvPr id="3" name="Content Placeholder 2">
-            <a:extLst>
-              <a:ext uri="{FF2B5EF4-FFF2-40B4-BE49-F238E27FC236}">
-                <a16:creationId xmlns:a16="http://schemas.microsoft.com/office/drawing/2014/main" id="{1A3E2549-1EBC-B27D-5B4C-56123FFE165B}"/>
-              </a:ext>
-            </a:extLst>
-          </p:cNvPr>
-          <p:cNvSpPr>
-            <a:spLocks noGrp="1"/>
-          </p:cNvSpPr>
-          <p:nvPr>
-            <p:ph idx="1"/>
-          </p:nvPr>
-        </p:nvSpPr>
-        <p:spPr/>
-        <p:txBody>
-          <a:bodyPr/>
-          <a:lstStyle/>
-          <a:p>
-            <a:endParaRPr lang="en-US"/>
-          </a:p>
-        </p:txBody>
-      </p:sp>
-    </p:spTree>
-    <p:extLst>
-      <p:ext uri="{BB962C8B-B14F-4D97-AF65-F5344CB8AC3E}">
-        <p14:creationId xmlns:p14="http://schemas.microsoft.com/office/powerpoint/2010/main" val="2822892622"/>
-      </p:ext>
-    </p:extLst>
-  </p:cSld>
-  <p:clrMapOvr>
-    <a:masterClrMapping/>
-  </p:clrMapOvr>
-</p:sld>
-</file>
-
-<file path=ppt/slides/slide5.xml><?xml version="1.0" encoding="utf-8"?>
-<p:sld xmlns:a="http://schemas.openxmlformats.org/drawingml/2006/main" xmlns:r="http://schemas.openxmlformats.org/officeDocument/2006/relationships" xmlns:p="http://schemas.openxmlformats.org/presentationml/2006/main">
-  <p:cSld>
-    <p:spTree>
-      <p:nvGrpSpPr>
-        <p:cNvPr id="1" name=""/>
-        <p:cNvGrpSpPr/>
-        <p:nvPr/>
-      </p:nvGrpSpPr>
-      <p:grpSpPr>
-        <a:xfrm>
-          <a:off x="0" y="0"/>
-          <a:ext cx="0" cy="0"/>
-          <a:chOff x="0" y="0"/>
-          <a:chExt cx="0" cy="0"/>
-        </a:xfrm>
-      </p:grpSpPr>
-      <p:sp>
-        <p:nvSpPr>
-          <p:cNvPr id="2" name="Title 1">
-            <a:extLst>
-              <a:ext uri="{FF2B5EF4-FFF2-40B4-BE49-F238E27FC236}">
-                <a16:creationId xmlns:a16="http://schemas.microsoft.com/office/drawing/2014/main" id="{68F4FC0C-A23E-D74B-F1DF-5D461D21668D}"/>
-              </a:ext>
-            </a:extLst>
-          </p:cNvPr>
-          <p:cNvSpPr>
-            <a:spLocks noGrp="1"/>
-          </p:cNvSpPr>
-          <p:nvPr>
-            <p:ph type="title"/>
-          </p:nvPr>
-        </p:nvSpPr>
-        <p:spPr/>
-        <p:txBody>
-          <a:bodyPr/>
-          <a:lstStyle/>
-          <a:p>
-            <a:r>
-              <a:rPr lang="en-US" dirty="0"/>
-              <a:t>Part 2 – Approach</a:t>
-            </a:r>
-          </a:p>
-        </p:txBody>
-      </p:sp>
-      <p:sp>
-        <p:nvSpPr>
-          <p:cNvPr id="3" name="Content Placeholder 2">
-            <a:extLst>
-              <a:ext uri="{FF2B5EF4-FFF2-40B4-BE49-F238E27FC236}">
-                <a16:creationId xmlns:a16="http://schemas.microsoft.com/office/drawing/2014/main" id="{585BBA4F-AC3D-AC68-6162-E0F999A8794B}"/>
-              </a:ext>
-            </a:extLst>
-          </p:cNvPr>
-          <p:cNvSpPr>
-            <a:spLocks noGrp="1"/>
-          </p:cNvSpPr>
-          <p:nvPr>
-            <p:ph idx="1"/>
-          </p:nvPr>
-        </p:nvSpPr>
-        <p:spPr/>
-        <p:txBody>
-          <a:bodyPr>
-            <a:normAutofit fontScale="92500" lnSpcReduction="20000"/>
-          </a:bodyPr>
-          <a:lstStyle/>
-          <a:p>
-            <a:r>
-              <a:rPr lang="en-US" dirty="0"/>
-              <a:t>Model Selection (Traditional): </a:t>
-            </a:r>
-            <a:r>
-              <a:rPr lang="en-US" dirty="0" err="1"/>
-              <a:t>LogReg</a:t>
-            </a:r>
-            <a:endParaRPr lang="en-US" dirty="0"/>
-          </a:p>
-          <a:p>
-            <a:pPr lvl="1"/>
-            <a:r>
-              <a:rPr lang="en-US" dirty="0" err="1"/>
-              <a:t>StratifiedKFold</a:t>
-            </a:r>
-            <a:r>
-              <a:rPr lang="en-US" dirty="0"/>
-              <a:t> CV used to determine best model</a:t>
-            </a:r>
-          </a:p>
-          <a:p>
-            <a:pPr lvl="1"/>
-            <a:r>
-              <a:rPr lang="en-US" dirty="0" err="1"/>
-              <a:t>StandardScalar</a:t>
-            </a:r>
-            <a:r>
-              <a:rPr lang="en-US" dirty="0"/>
-              <a:t> used to normalize data</a:t>
-            </a:r>
-          </a:p>
-          <a:p>
-            <a:pPr lvl="1"/>
-            <a:r>
-              <a:rPr lang="en-US" dirty="0" err="1"/>
-              <a:t>SelectKBest</a:t>
-            </a:r>
-            <a:r>
-              <a:rPr lang="en-US" dirty="0"/>
-              <a:t> used to reduce dimensionality</a:t>
-            </a:r>
-          </a:p>
-          <a:p>
-            <a:pPr lvl="1"/>
-            <a:endParaRPr lang="en-US" dirty="0"/>
-          </a:p>
-          <a:p>
-            <a:r>
-              <a:rPr lang="en-US" dirty="0"/>
-              <a:t>Model Selection (Deep Learning): MLP</a:t>
-            </a:r>
-          </a:p>
-          <a:p>
-            <a:pPr lvl="1"/>
-            <a:r>
-              <a:rPr lang="en-US" dirty="0" err="1"/>
-              <a:t>RepeatedStratifiedKFold</a:t>
-            </a:r>
-            <a:r>
-              <a:rPr lang="en-US" dirty="0"/>
-              <a:t> CV used to determine hyperparameters</a:t>
-            </a:r>
-          </a:p>
-          <a:p>
-            <a:pPr lvl="1"/>
-            <a:r>
-              <a:rPr lang="en-US" dirty="0" err="1"/>
-              <a:t>StandardScalar</a:t>
-            </a:r>
-            <a:r>
-              <a:rPr lang="en-US" dirty="0"/>
-              <a:t> used to normalize data</a:t>
-            </a:r>
-          </a:p>
-          <a:p>
-            <a:pPr lvl="1"/>
-            <a:r>
-              <a:rPr lang="en-US" dirty="0" err="1"/>
-              <a:t>SelectKBest</a:t>
-            </a:r>
-            <a:r>
-              <a:rPr lang="en-US" dirty="0"/>
-              <a:t> used to reduce dimensionality</a:t>
-            </a:r>
-          </a:p>
-          <a:p>
-            <a:pPr lvl="1"/>
-            <a:r>
-              <a:rPr lang="en-US" dirty="0" err="1"/>
-              <a:t>ReLU</a:t>
-            </a:r>
-            <a:r>
-              <a:rPr lang="en-US" dirty="0"/>
-              <a:t> with 0.25 dropout</a:t>
-            </a:r>
-          </a:p>
-          <a:p>
-            <a:pPr lvl="1"/>
-            <a:r>
-              <a:rPr lang="en-US" dirty="0" err="1"/>
-              <a:t>BatchNorm</a:t>
-            </a:r>
-            <a:r>
-              <a:rPr lang="en-US" dirty="0"/>
-              <a:t> used to normalize activations</a:t>
-            </a:r>
-          </a:p>
-          <a:p>
-            <a:pPr lvl="1"/>
-            <a:r>
-              <a:rPr lang="en-US" dirty="0" err="1"/>
-              <a:t>BCEWithLogitsLoss</a:t>
-            </a:r>
-            <a:r>
-              <a:rPr lang="en-US" dirty="0"/>
-              <a:t> used to measure error</a:t>
-            </a:r>
-          </a:p>
-          <a:p>
-            <a:endParaRPr lang="en-US" dirty="0"/>
-          </a:p>
-        </p:txBody>
-      </p:sp>
-    </p:spTree>
-    <p:extLst>
-      <p:ext uri="{BB962C8B-B14F-4D97-AF65-F5344CB8AC3E}">
-        <p14:creationId xmlns:p14="http://schemas.microsoft.com/office/powerpoint/2010/main" val="185969209"/>
-      </p:ext>
-    </p:extLst>
-  </p:cSld>
-  <p:clrMapOvr>
-    <a:masterClrMapping/>
-  </p:clrMapOvr>
-</p:sld>
-</file>
-
-<file path=ppt/slides/slide6.xml><?xml version="1.0" encoding="utf-8"?>
-<p:sld xmlns:a="http://schemas.openxmlformats.org/drawingml/2006/main" xmlns:r="http://schemas.openxmlformats.org/officeDocument/2006/relationships" xmlns:p="http://schemas.openxmlformats.org/presentationml/2006/main">
-  <p:cSld>
-    <p:spTree>
-      <p:nvGrpSpPr>
-        <p:cNvPr id="1" name=""/>
-        <p:cNvGrpSpPr/>
-        <p:nvPr/>
-      </p:nvGrpSpPr>
-      <p:grpSpPr>
-        <a:xfrm>
-          <a:off x="0" y="0"/>
-          <a:ext cx="0" cy="0"/>
-          <a:chOff x="0" y="0"/>
-          <a:chExt cx="0" cy="0"/>
-        </a:xfrm>
-      </p:grpSpPr>
-      <p:sp>
-        <p:nvSpPr>
-          <p:cNvPr id="2" name="Title 1">
-            <a:extLst>
-              <a:ext uri="{FF2B5EF4-FFF2-40B4-BE49-F238E27FC236}">
-                <a16:creationId xmlns:a16="http://schemas.microsoft.com/office/drawing/2014/main" id="{64AD0586-234F-A455-C049-C953A2065E61}"/>
-              </a:ext>
-            </a:extLst>
-          </p:cNvPr>
-          <p:cNvSpPr>
-            <a:spLocks noGrp="1"/>
-          </p:cNvSpPr>
-          <p:nvPr>
-            <p:ph type="title"/>
-          </p:nvPr>
-        </p:nvSpPr>
-        <p:spPr/>
-        <p:txBody>
-          <a:bodyPr/>
-          <a:lstStyle/>
-          <a:p>
-            <a:r>
-              <a:rPr lang="en-US" dirty="0"/>
-              <a:t>Part 2 – Results</a:t>
-            </a:r>
-          </a:p>
-        </p:txBody>
-      </p:sp>
-      <p:sp>
-        <p:nvSpPr>
-          <p:cNvPr id="3" name="Content Placeholder 2">
-            <a:extLst>
-              <a:ext uri="{FF2B5EF4-FFF2-40B4-BE49-F238E27FC236}">
-                <a16:creationId xmlns:a16="http://schemas.microsoft.com/office/drawing/2014/main" id="{561478C8-F244-57BA-FCE1-BB7325332BFE}"/>
-              </a:ext>
-            </a:extLst>
-          </p:cNvPr>
-          <p:cNvSpPr>
-            <a:spLocks noGrp="1"/>
-          </p:cNvSpPr>
-          <p:nvPr>
-            <p:ph idx="1"/>
-          </p:nvPr>
-        </p:nvSpPr>
-        <p:spPr/>
-        <p:txBody>
-          <a:bodyPr/>
-          <a:lstStyle/>
-          <a:p>
-            <a:endParaRPr lang="en-US" dirty="0"/>
-          </a:p>
-        </p:txBody>
-      </p:sp>
-    </p:spTree>
-    <p:extLst>
-      <p:ext uri="{BB962C8B-B14F-4D97-AF65-F5344CB8AC3E}">
-        <p14:creationId xmlns:p14="http://schemas.microsoft.com/office/powerpoint/2010/main" val="373993910"/>
-      </p:ext>
-    </p:extLst>
-  </p:cSld>
-  <p:clrMapOvr>
-    <a:masterClrMapping/>
-  </p:clrMapOvr>
-</p:sld>
-</file>
-
-<file path=ppt/slides/slide7.xml><?xml version="1.0" encoding="utf-8"?>
-<p:sld xmlns:a="http://schemas.openxmlformats.org/drawingml/2006/main" xmlns:r="http://schemas.openxmlformats.org/officeDocument/2006/relationships" xmlns:p="http://schemas.openxmlformats.org/presentationml/2006/main">
-  <p:cSld>
-    <p:spTree>
-      <p:nvGrpSpPr>
-        <p:cNvPr id="1" name=""/>
-        <p:cNvGrpSpPr/>
-        <p:nvPr/>
-      </p:nvGrpSpPr>
-      <p:grpSpPr>
-        <a:xfrm>
-          <a:off x="0" y="0"/>
-          <a:ext cx="0" cy="0"/>
-          <a:chOff x="0" y="0"/>
-          <a:chExt cx="0" cy="0"/>
-        </a:xfrm>
-      </p:grpSpPr>
-      <p:sp>
-        <p:nvSpPr>
-          <p:cNvPr id="2" name="Title 1">
-            <a:extLst>
-              <a:ext uri="{FF2B5EF4-FFF2-40B4-BE49-F238E27FC236}">
-                <a16:creationId xmlns:a16="http://schemas.microsoft.com/office/drawing/2014/main" id="{804B22E2-45CD-80E4-43BD-6E3DC616A6BA}"/>
-              </a:ext>
-            </a:extLst>
-          </p:cNvPr>
-          <p:cNvSpPr>
-            <a:spLocks noGrp="1"/>
-          </p:cNvSpPr>
-          <p:nvPr>
-            <p:ph type="title"/>
-          </p:nvPr>
-        </p:nvSpPr>
-        <p:spPr/>
-        <p:txBody>
-          <a:bodyPr/>
-          <a:lstStyle/>
-          <a:p>
-            <a:r>
-              <a:rPr lang="en-US" dirty="0"/>
-              <a:t>Part </a:t>
-            </a:r>
-            <a:r>
-              <a:rPr lang="en-US"/>
-              <a:t>2 – Conclusion</a:t>
-            </a:r>
-          </a:p>
-        </p:txBody>
-      </p:sp>
-      <p:sp>
-        <p:nvSpPr>
-          <p:cNvPr id="3" name="Content Placeholder 2">
-            <a:extLst>
-              <a:ext uri="{FF2B5EF4-FFF2-40B4-BE49-F238E27FC236}">
-                <a16:creationId xmlns:a16="http://schemas.microsoft.com/office/drawing/2014/main" id="{9A469714-4927-D2FD-DF64-9AC206900752}"/>
-              </a:ext>
-            </a:extLst>
-          </p:cNvPr>
-          <p:cNvSpPr>
-            <a:spLocks noGrp="1"/>
-          </p:cNvSpPr>
-          <p:nvPr>
-            <p:ph idx="1"/>
-          </p:nvPr>
-        </p:nvSpPr>
-        <p:spPr/>
-        <p:txBody>
-          <a:bodyPr/>
-          <a:lstStyle/>
-          <a:p>
-            <a:endParaRPr lang="en-US"/>
-          </a:p>
-        </p:txBody>
-      </p:sp>
-    </p:spTree>
-    <p:extLst>
-      <p:ext uri="{BB962C8B-B14F-4D97-AF65-F5344CB8AC3E}">
-        <p14:creationId xmlns:p14="http://schemas.microsoft.com/office/powerpoint/2010/main" val="1077775097"/>
-      </p:ext>
-    </p:extLst>
-  </p:cSld>
-  <p:clrMapOvr>
-    <a:masterClrMapping/>
-  </p:clrMapOvr>
-</p:sld>
-</file>
-
-<file path=ppt/slides/slide8.xml><?xml version="1.0" encoding="utf-8"?>
+<file path=ppt/slides/slide10.xml><?xml version="1.0" encoding="utf-8"?>
 <p:sld xmlns:a="http://schemas.openxmlformats.org/drawingml/2006/main" xmlns:r="http://schemas.openxmlformats.org/officeDocument/2006/relationships" xmlns:p="http://schemas.openxmlformats.org/presentationml/2006/main">
   <p:cSld>
     <p:bg>
@@ -6671,6 +6049,966 @@
     <p:extLst>
       <p:ext uri="{BB962C8B-B14F-4D97-AF65-F5344CB8AC3E}">
         <p14:creationId xmlns:p14="http://schemas.microsoft.com/office/powerpoint/2010/main" val="1840442817"/>
+      </p:ext>
+    </p:extLst>
+  </p:cSld>
+  <p:clrMapOvr>
+    <a:masterClrMapping/>
+  </p:clrMapOvr>
+</p:sld>
+</file>
+
+<file path=ppt/slides/slide2.xml><?xml version="1.0" encoding="utf-8"?>
+<p:sld xmlns:a="http://schemas.openxmlformats.org/drawingml/2006/main" xmlns:r="http://schemas.openxmlformats.org/officeDocument/2006/relationships" xmlns:p="http://schemas.openxmlformats.org/presentationml/2006/main">
+  <p:cSld>
+    <p:spTree>
+      <p:nvGrpSpPr>
+        <p:cNvPr id="1" name=""/>
+        <p:cNvGrpSpPr/>
+        <p:nvPr/>
+      </p:nvGrpSpPr>
+      <p:grpSpPr>
+        <a:xfrm>
+          <a:off x="0" y="0"/>
+          <a:ext cx="0" cy="0"/>
+          <a:chOff x="0" y="0"/>
+          <a:chExt cx="0" cy="0"/>
+        </a:xfrm>
+      </p:grpSpPr>
+      <p:sp>
+        <p:nvSpPr>
+          <p:cNvPr id="2" name="Title 1">
+            <a:extLst>
+              <a:ext uri="{FF2B5EF4-FFF2-40B4-BE49-F238E27FC236}">
+                <a16:creationId xmlns:a16="http://schemas.microsoft.com/office/drawing/2014/main" id="{16EDB5F4-3BF6-497A-48FF-017CB1559176}"/>
+              </a:ext>
+            </a:extLst>
+          </p:cNvPr>
+          <p:cNvSpPr>
+            <a:spLocks noGrp="1"/>
+          </p:cNvSpPr>
+          <p:nvPr>
+            <p:ph type="title"/>
+          </p:nvPr>
+        </p:nvSpPr>
+        <p:spPr/>
+        <p:txBody>
+          <a:bodyPr/>
+          <a:lstStyle/>
+          <a:p>
+            <a:r>
+              <a:rPr lang="en-US" dirty="0"/>
+              <a:t>Part 1a - Approach </a:t>
+            </a:r>
+          </a:p>
+        </p:txBody>
+      </p:sp>
+      <p:sp>
+        <p:nvSpPr>
+          <p:cNvPr id="3" name="Content Placeholder 2">
+            <a:extLst>
+              <a:ext uri="{FF2B5EF4-FFF2-40B4-BE49-F238E27FC236}">
+                <a16:creationId xmlns:a16="http://schemas.microsoft.com/office/drawing/2014/main" id="{901B5B7B-EE18-EB6F-E7AD-6D5F1DEC6953}"/>
+              </a:ext>
+            </a:extLst>
+          </p:cNvPr>
+          <p:cNvSpPr>
+            <a:spLocks noGrp="1"/>
+          </p:cNvSpPr>
+          <p:nvPr>
+            <p:ph idx="1"/>
+          </p:nvPr>
+        </p:nvSpPr>
+        <p:spPr/>
+        <p:txBody>
+          <a:bodyPr/>
+          <a:lstStyle/>
+          <a:p>
+            <a:r>
+              <a:rPr lang="en-US" dirty="0"/>
+              <a:t>Model Section (Traditional): Gradient Boosting + PCA</a:t>
+            </a:r>
+          </a:p>
+          <a:p>
+            <a:pPr lvl="1"/>
+            <a:r>
+              <a:rPr lang="en-US" dirty="0" err="1"/>
+              <a:t>StratifiedKFold</a:t>
+            </a:r>
+            <a:r>
+              <a:rPr lang="en-US" dirty="0"/>
+              <a:t> CV (k=5) used to test multiple models</a:t>
+            </a:r>
+          </a:p>
+          <a:p>
+            <a:pPr lvl="2"/>
+            <a:r>
+              <a:rPr lang="en-US" dirty="0"/>
+              <a:t>Logistic Regression, KNN, SVM...</a:t>
+            </a:r>
+          </a:p>
+          <a:p>
+            <a:pPr lvl="2"/>
+            <a:r>
+              <a:rPr lang="en-US" dirty="0"/>
+              <a:t>Performance metric was accuracy over all 5 folds</a:t>
+            </a:r>
+          </a:p>
+          <a:p>
+            <a:pPr lvl="3"/>
+            <a:r>
+              <a:rPr lang="en-US" dirty="0"/>
+              <a:t>Perfectly balanced classes</a:t>
+            </a:r>
+            <a:endParaRPr lang="en-US" b="1" dirty="0"/>
+          </a:p>
+          <a:p>
+            <a:pPr lvl="1"/>
+            <a:r>
+              <a:rPr lang="en-US" dirty="0"/>
+              <a:t>PCA to reduce dimensionality</a:t>
+            </a:r>
+          </a:p>
+          <a:p>
+            <a:pPr lvl="2"/>
+            <a:r>
+              <a:rPr lang="en-US" dirty="0"/>
+              <a:t>48 dimensions to 31 dimensions</a:t>
+            </a:r>
+          </a:p>
+          <a:p>
+            <a:pPr lvl="2"/>
+            <a:r>
+              <a:rPr lang="en-US" dirty="0"/>
+              <a:t>95% variance threshold</a:t>
+            </a:r>
+          </a:p>
+          <a:p>
+            <a:pPr lvl="1"/>
+            <a:r>
+              <a:rPr lang="en-US" dirty="0" err="1"/>
+              <a:t>Standardscalar</a:t>
+            </a:r>
+            <a:r>
+              <a:rPr lang="en-US" dirty="0"/>
+              <a:t> to normalize data</a:t>
+            </a:r>
+          </a:p>
+          <a:p>
+            <a:pPr lvl="1"/>
+            <a:r>
+              <a:rPr lang="en-US" dirty="0"/>
+              <a:t>Used </a:t>
+            </a:r>
+            <a:r>
+              <a:rPr lang="en-US" dirty="0" err="1"/>
+              <a:t>GirdSearchCV</a:t>
+            </a:r>
+            <a:r>
+              <a:rPr lang="en-US" dirty="0"/>
+              <a:t> for some models</a:t>
+            </a:r>
+          </a:p>
+        </p:txBody>
+      </p:sp>
+    </p:spTree>
+    <p:extLst>
+      <p:ext uri="{BB962C8B-B14F-4D97-AF65-F5344CB8AC3E}">
+        <p14:creationId xmlns:p14="http://schemas.microsoft.com/office/powerpoint/2010/main" val="3583789835"/>
+      </p:ext>
+    </p:extLst>
+  </p:cSld>
+  <p:clrMapOvr>
+    <a:masterClrMapping/>
+  </p:clrMapOvr>
+</p:sld>
+</file>
+
+<file path=ppt/slides/slide3.xml><?xml version="1.0" encoding="utf-8"?>
+<p:sld xmlns:a="http://schemas.openxmlformats.org/drawingml/2006/main" xmlns:r="http://schemas.openxmlformats.org/officeDocument/2006/relationships" xmlns:p="http://schemas.openxmlformats.org/presentationml/2006/main">
+  <p:cSld>
+    <p:spTree>
+      <p:nvGrpSpPr>
+        <p:cNvPr id="1" name=""/>
+        <p:cNvGrpSpPr/>
+        <p:nvPr/>
+      </p:nvGrpSpPr>
+      <p:grpSpPr>
+        <a:xfrm>
+          <a:off x="0" y="0"/>
+          <a:ext cx="0" cy="0"/>
+          <a:chOff x="0" y="0"/>
+          <a:chExt cx="0" cy="0"/>
+        </a:xfrm>
+      </p:grpSpPr>
+      <p:sp>
+        <p:nvSpPr>
+          <p:cNvPr id="2" name="Title 1">
+            <a:extLst>
+              <a:ext uri="{FF2B5EF4-FFF2-40B4-BE49-F238E27FC236}">
+                <a16:creationId xmlns:a16="http://schemas.microsoft.com/office/drawing/2014/main" id="{BECEAD95-E2F3-1454-3809-832098E09252}"/>
+              </a:ext>
+            </a:extLst>
+          </p:cNvPr>
+          <p:cNvSpPr>
+            <a:spLocks noGrp="1"/>
+          </p:cNvSpPr>
+          <p:nvPr>
+            <p:ph type="title"/>
+          </p:nvPr>
+        </p:nvSpPr>
+        <p:spPr/>
+        <p:txBody>
+          <a:bodyPr/>
+          <a:lstStyle/>
+          <a:p>
+            <a:r>
+              <a:rPr lang="en-US" dirty="0"/>
+              <a:t>Part 1a - Results</a:t>
+            </a:r>
+          </a:p>
+        </p:txBody>
+      </p:sp>
+      <p:sp>
+        <p:nvSpPr>
+          <p:cNvPr id="3" name="Content Placeholder 2">
+            <a:extLst>
+              <a:ext uri="{FF2B5EF4-FFF2-40B4-BE49-F238E27FC236}">
+                <a16:creationId xmlns:a16="http://schemas.microsoft.com/office/drawing/2014/main" id="{9977B685-5EAF-7CEA-BF76-3B9365AED698}"/>
+              </a:ext>
+            </a:extLst>
+          </p:cNvPr>
+          <p:cNvSpPr>
+            <a:spLocks noGrp="1"/>
+          </p:cNvSpPr>
+          <p:nvPr>
+            <p:ph idx="1"/>
+          </p:nvPr>
+        </p:nvSpPr>
+        <p:spPr/>
+        <p:txBody>
+          <a:bodyPr/>
+          <a:lstStyle/>
+          <a:p>
+            <a:r>
+              <a:rPr lang="en-US" dirty="0"/>
+              <a:t>Five-fold CV results (80%)</a:t>
+            </a:r>
+          </a:p>
+          <a:p>
+            <a:pPr lvl="1"/>
+            <a:r>
+              <a:rPr lang="en-US" dirty="0"/>
+              <a:t>Mean accuracy of 0.759</a:t>
+            </a:r>
+          </a:p>
+          <a:p>
+            <a:pPr lvl="1"/>
+            <a:r>
+              <a:rPr lang="en-US" dirty="0"/>
+              <a:t>Mean F1 score of 0.758</a:t>
+            </a:r>
+          </a:p>
+          <a:p>
+            <a:r>
+              <a:rPr lang="en-US" dirty="0"/>
+              <a:t>20% held out set</a:t>
+            </a:r>
+          </a:p>
+          <a:p>
+            <a:pPr lvl="1"/>
+            <a:r>
+              <a:rPr lang="en-US" dirty="0"/>
+              <a:t>Mean accuracy and F1 score of 0.760</a:t>
+            </a:r>
+          </a:p>
+          <a:p>
+            <a:r>
+              <a:rPr lang="en-US" dirty="0"/>
+              <a:t>Predicted Results on test set</a:t>
+            </a:r>
+          </a:p>
+          <a:p>
+            <a:pPr lvl="1"/>
+            <a:r>
+              <a:rPr lang="en-US" dirty="0"/>
+              <a:t>Similar to held out set</a:t>
+            </a:r>
+          </a:p>
+        </p:txBody>
+      </p:sp>
+    </p:spTree>
+    <p:extLst>
+      <p:ext uri="{BB962C8B-B14F-4D97-AF65-F5344CB8AC3E}">
+        <p14:creationId xmlns:p14="http://schemas.microsoft.com/office/powerpoint/2010/main" val="700886777"/>
+      </p:ext>
+    </p:extLst>
+  </p:cSld>
+  <p:clrMapOvr>
+    <a:masterClrMapping/>
+  </p:clrMapOvr>
+</p:sld>
+</file>
+
+<file path=ppt/slides/slide4.xml><?xml version="1.0" encoding="utf-8"?>
+<p:sld xmlns:a="http://schemas.openxmlformats.org/drawingml/2006/main" xmlns:r="http://schemas.openxmlformats.org/officeDocument/2006/relationships" xmlns:p="http://schemas.openxmlformats.org/presentationml/2006/main">
+  <p:cSld>
+    <p:spTree>
+      <p:nvGrpSpPr>
+        <p:cNvPr id="1" name=""/>
+        <p:cNvGrpSpPr/>
+        <p:nvPr/>
+      </p:nvGrpSpPr>
+      <p:grpSpPr>
+        <a:xfrm>
+          <a:off x="0" y="0"/>
+          <a:ext cx="0" cy="0"/>
+          <a:chOff x="0" y="0"/>
+          <a:chExt cx="0" cy="0"/>
+        </a:xfrm>
+      </p:grpSpPr>
+      <p:sp>
+        <p:nvSpPr>
+          <p:cNvPr id="2" name="Title 1">
+            <a:extLst>
+              <a:ext uri="{FF2B5EF4-FFF2-40B4-BE49-F238E27FC236}">
+                <a16:creationId xmlns:a16="http://schemas.microsoft.com/office/drawing/2014/main" id="{9C754F3D-4067-E7D6-865F-49FF49C1EB96}"/>
+              </a:ext>
+            </a:extLst>
+          </p:cNvPr>
+          <p:cNvSpPr>
+            <a:spLocks noGrp="1"/>
+          </p:cNvSpPr>
+          <p:nvPr>
+            <p:ph type="title"/>
+          </p:nvPr>
+        </p:nvSpPr>
+        <p:spPr/>
+        <p:txBody>
+          <a:bodyPr/>
+          <a:lstStyle/>
+          <a:p>
+            <a:r>
+              <a:rPr lang="en-US" dirty="0"/>
+              <a:t>Part 1b - Approach </a:t>
+            </a:r>
+          </a:p>
+        </p:txBody>
+      </p:sp>
+      <p:sp>
+        <p:nvSpPr>
+          <p:cNvPr id="3" name="Content Placeholder 2">
+            <a:extLst>
+              <a:ext uri="{FF2B5EF4-FFF2-40B4-BE49-F238E27FC236}">
+                <a16:creationId xmlns:a16="http://schemas.microsoft.com/office/drawing/2014/main" id="{89565C86-32DF-A074-928D-2764F1413C8F}"/>
+              </a:ext>
+            </a:extLst>
+          </p:cNvPr>
+          <p:cNvSpPr>
+            <a:spLocks noGrp="1"/>
+          </p:cNvSpPr>
+          <p:nvPr>
+            <p:ph idx="1"/>
+          </p:nvPr>
+        </p:nvSpPr>
+        <p:spPr/>
+        <p:txBody>
+          <a:bodyPr/>
+          <a:lstStyle/>
+          <a:p>
+            <a:r>
+              <a:rPr lang="en-US" dirty="0"/>
+              <a:t>Model selection: Multi-Layer Perception (MLP)</a:t>
+            </a:r>
+          </a:p>
+          <a:p>
+            <a:pPr lvl="1"/>
+            <a:r>
+              <a:rPr lang="en-US" dirty="0"/>
+              <a:t>Two hidden layers, 128 and 64 nodes</a:t>
+            </a:r>
+          </a:p>
+          <a:p>
+            <a:pPr lvl="1"/>
+            <a:endParaRPr lang="en-US" dirty="0"/>
+          </a:p>
+        </p:txBody>
+      </p:sp>
+    </p:spTree>
+    <p:extLst>
+      <p:ext uri="{BB962C8B-B14F-4D97-AF65-F5344CB8AC3E}">
+        <p14:creationId xmlns:p14="http://schemas.microsoft.com/office/powerpoint/2010/main" val="1407261242"/>
+      </p:ext>
+    </p:extLst>
+  </p:cSld>
+  <p:clrMapOvr>
+    <a:masterClrMapping/>
+  </p:clrMapOvr>
+</p:sld>
+</file>
+
+<file path=ppt/slides/slide5.xml><?xml version="1.0" encoding="utf-8"?>
+<p:sld xmlns:a="http://schemas.openxmlformats.org/drawingml/2006/main" xmlns:r="http://schemas.openxmlformats.org/officeDocument/2006/relationships" xmlns:p="http://schemas.openxmlformats.org/presentationml/2006/main">
+  <p:cSld>
+    <p:spTree>
+      <p:nvGrpSpPr>
+        <p:cNvPr id="1" name=""/>
+        <p:cNvGrpSpPr/>
+        <p:nvPr/>
+      </p:nvGrpSpPr>
+      <p:grpSpPr>
+        <a:xfrm>
+          <a:off x="0" y="0"/>
+          <a:ext cx="0" cy="0"/>
+          <a:chOff x="0" y="0"/>
+          <a:chExt cx="0" cy="0"/>
+        </a:xfrm>
+      </p:grpSpPr>
+      <p:sp>
+        <p:nvSpPr>
+          <p:cNvPr id="2" name="Title 1">
+            <a:extLst>
+              <a:ext uri="{FF2B5EF4-FFF2-40B4-BE49-F238E27FC236}">
+                <a16:creationId xmlns:a16="http://schemas.microsoft.com/office/drawing/2014/main" id="{C0205E8D-91D7-813C-F768-58A813FB8534}"/>
+              </a:ext>
+            </a:extLst>
+          </p:cNvPr>
+          <p:cNvSpPr>
+            <a:spLocks noGrp="1"/>
+          </p:cNvSpPr>
+          <p:nvPr>
+            <p:ph type="title"/>
+          </p:nvPr>
+        </p:nvSpPr>
+        <p:spPr/>
+        <p:txBody>
+          <a:bodyPr/>
+          <a:lstStyle/>
+          <a:p>
+            <a:r>
+              <a:rPr lang="en-US" dirty="0"/>
+              <a:t>Part 1b - Results</a:t>
+            </a:r>
+          </a:p>
+        </p:txBody>
+      </p:sp>
+      <p:sp>
+        <p:nvSpPr>
+          <p:cNvPr id="3" name="Content Placeholder 2">
+            <a:extLst>
+              <a:ext uri="{FF2B5EF4-FFF2-40B4-BE49-F238E27FC236}">
+                <a16:creationId xmlns:a16="http://schemas.microsoft.com/office/drawing/2014/main" id="{09677AF6-26F1-7D95-A069-4F49FCBFB385}"/>
+              </a:ext>
+            </a:extLst>
+          </p:cNvPr>
+          <p:cNvSpPr>
+            <a:spLocks noGrp="1"/>
+          </p:cNvSpPr>
+          <p:nvPr>
+            <p:ph idx="1"/>
+          </p:nvPr>
+        </p:nvSpPr>
+        <p:spPr/>
+        <p:txBody>
+          <a:bodyPr/>
+          <a:lstStyle/>
+          <a:p>
+            <a:endParaRPr lang="en-US"/>
+          </a:p>
+        </p:txBody>
+      </p:sp>
+    </p:spTree>
+    <p:extLst>
+      <p:ext uri="{BB962C8B-B14F-4D97-AF65-F5344CB8AC3E}">
+        <p14:creationId xmlns:p14="http://schemas.microsoft.com/office/powerpoint/2010/main" val="3470016463"/>
+      </p:ext>
+    </p:extLst>
+  </p:cSld>
+  <p:clrMapOvr>
+    <a:masterClrMapping/>
+  </p:clrMapOvr>
+</p:sld>
+</file>
+
+<file path=ppt/slides/slide6.xml><?xml version="1.0" encoding="utf-8"?>
+<p:sld xmlns:a="http://schemas.openxmlformats.org/drawingml/2006/main" xmlns:r="http://schemas.openxmlformats.org/officeDocument/2006/relationships" xmlns:p="http://schemas.openxmlformats.org/presentationml/2006/main">
+  <p:cSld>
+    <p:spTree>
+      <p:nvGrpSpPr>
+        <p:cNvPr id="1" name=""/>
+        <p:cNvGrpSpPr/>
+        <p:nvPr/>
+      </p:nvGrpSpPr>
+      <p:grpSpPr>
+        <a:xfrm>
+          <a:off x="0" y="0"/>
+          <a:ext cx="0" cy="0"/>
+          <a:chOff x="0" y="0"/>
+          <a:chExt cx="0" cy="0"/>
+        </a:xfrm>
+      </p:grpSpPr>
+      <p:sp>
+        <p:nvSpPr>
+          <p:cNvPr id="2" name="Title 1">
+            <a:extLst>
+              <a:ext uri="{FF2B5EF4-FFF2-40B4-BE49-F238E27FC236}">
+                <a16:creationId xmlns:a16="http://schemas.microsoft.com/office/drawing/2014/main" id="{ED040810-D060-8C4E-8BAA-E64C6833A0AB}"/>
+              </a:ext>
+            </a:extLst>
+          </p:cNvPr>
+          <p:cNvSpPr>
+            <a:spLocks noGrp="1"/>
+          </p:cNvSpPr>
+          <p:nvPr>
+            <p:ph type="title"/>
+          </p:nvPr>
+        </p:nvSpPr>
+        <p:spPr/>
+        <p:txBody>
+          <a:bodyPr/>
+          <a:lstStyle/>
+          <a:p>
+            <a:r>
+              <a:rPr lang="en-US" dirty="0"/>
+              <a:t>Part 1 – Conclusion</a:t>
+            </a:r>
+          </a:p>
+        </p:txBody>
+      </p:sp>
+      <p:sp>
+        <p:nvSpPr>
+          <p:cNvPr id="3" name="Content Placeholder 2">
+            <a:extLst>
+              <a:ext uri="{FF2B5EF4-FFF2-40B4-BE49-F238E27FC236}">
+                <a16:creationId xmlns:a16="http://schemas.microsoft.com/office/drawing/2014/main" id="{1A3E2549-1EBC-B27D-5B4C-56123FFE165B}"/>
+              </a:ext>
+            </a:extLst>
+          </p:cNvPr>
+          <p:cNvSpPr>
+            <a:spLocks noGrp="1"/>
+          </p:cNvSpPr>
+          <p:nvPr>
+            <p:ph idx="1"/>
+          </p:nvPr>
+        </p:nvSpPr>
+        <p:spPr/>
+        <p:txBody>
+          <a:bodyPr/>
+          <a:lstStyle/>
+          <a:p>
+            <a:pPr>
+              <a:lnSpc>
+                <a:spcPct val="200000"/>
+              </a:lnSpc>
+            </a:pPr>
+            <a:r>
+              <a:rPr lang="en-US" dirty="0"/>
+              <a:t>Training time is costly</a:t>
+            </a:r>
+          </a:p>
+          <a:p>
+            <a:pPr>
+              <a:lnSpc>
+                <a:spcPct val="200000"/>
+              </a:lnSpc>
+            </a:pPr>
+            <a:r>
+              <a:rPr lang="en-US" dirty="0"/>
+              <a:t>PCA is powerful</a:t>
+            </a:r>
+          </a:p>
+          <a:p>
+            <a:pPr>
+              <a:lnSpc>
+                <a:spcPct val="200000"/>
+              </a:lnSpc>
+            </a:pPr>
+            <a:r>
+              <a:rPr lang="en-US" dirty="0"/>
+              <a:t>Worth tuning hyperparameters?</a:t>
+            </a:r>
+          </a:p>
+        </p:txBody>
+      </p:sp>
+    </p:spTree>
+    <p:extLst>
+      <p:ext uri="{BB962C8B-B14F-4D97-AF65-F5344CB8AC3E}">
+        <p14:creationId xmlns:p14="http://schemas.microsoft.com/office/powerpoint/2010/main" val="2822892622"/>
+      </p:ext>
+    </p:extLst>
+  </p:cSld>
+  <p:clrMapOvr>
+    <a:masterClrMapping/>
+  </p:clrMapOvr>
+</p:sld>
+</file>
+
+<file path=ppt/slides/slide7.xml><?xml version="1.0" encoding="utf-8"?>
+<p:sld xmlns:a="http://schemas.openxmlformats.org/drawingml/2006/main" xmlns:r="http://schemas.openxmlformats.org/officeDocument/2006/relationships" xmlns:p="http://schemas.openxmlformats.org/presentationml/2006/main">
+  <p:cSld>
+    <p:spTree>
+      <p:nvGrpSpPr>
+        <p:cNvPr id="1" name=""/>
+        <p:cNvGrpSpPr/>
+        <p:nvPr/>
+      </p:nvGrpSpPr>
+      <p:grpSpPr>
+        <a:xfrm>
+          <a:off x="0" y="0"/>
+          <a:ext cx="0" cy="0"/>
+          <a:chOff x="0" y="0"/>
+          <a:chExt cx="0" cy="0"/>
+        </a:xfrm>
+      </p:grpSpPr>
+      <p:sp>
+        <p:nvSpPr>
+          <p:cNvPr id="2" name="Title 1">
+            <a:extLst>
+              <a:ext uri="{FF2B5EF4-FFF2-40B4-BE49-F238E27FC236}">
+                <a16:creationId xmlns:a16="http://schemas.microsoft.com/office/drawing/2014/main" id="{68F4FC0C-A23E-D74B-F1DF-5D461D21668D}"/>
+              </a:ext>
+            </a:extLst>
+          </p:cNvPr>
+          <p:cNvSpPr>
+            <a:spLocks noGrp="1"/>
+          </p:cNvSpPr>
+          <p:nvPr>
+            <p:ph type="title"/>
+          </p:nvPr>
+        </p:nvSpPr>
+        <p:spPr/>
+        <p:txBody>
+          <a:bodyPr/>
+          <a:lstStyle/>
+          <a:p>
+            <a:r>
+              <a:rPr lang="en-US" dirty="0"/>
+              <a:t>Part 2 – Approach</a:t>
+            </a:r>
+          </a:p>
+        </p:txBody>
+      </p:sp>
+      <p:sp>
+        <p:nvSpPr>
+          <p:cNvPr id="3" name="Content Placeholder 2">
+            <a:extLst>
+              <a:ext uri="{FF2B5EF4-FFF2-40B4-BE49-F238E27FC236}">
+                <a16:creationId xmlns:a16="http://schemas.microsoft.com/office/drawing/2014/main" id="{585BBA4F-AC3D-AC68-6162-E0F999A8794B}"/>
+              </a:ext>
+            </a:extLst>
+          </p:cNvPr>
+          <p:cNvSpPr>
+            <a:spLocks noGrp="1"/>
+          </p:cNvSpPr>
+          <p:nvPr>
+            <p:ph idx="1"/>
+          </p:nvPr>
+        </p:nvSpPr>
+        <p:spPr/>
+        <p:txBody>
+          <a:bodyPr>
+            <a:normAutofit fontScale="92500" lnSpcReduction="20000"/>
+          </a:bodyPr>
+          <a:lstStyle/>
+          <a:p>
+            <a:r>
+              <a:rPr lang="en-US" dirty="0"/>
+              <a:t>Model Selection (Traditional): </a:t>
+            </a:r>
+            <a:r>
+              <a:rPr lang="en-US" dirty="0" err="1"/>
+              <a:t>LogReg</a:t>
+            </a:r>
+            <a:endParaRPr lang="en-US" dirty="0"/>
+          </a:p>
+          <a:p>
+            <a:pPr lvl="1"/>
+            <a:r>
+              <a:rPr lang="en-US" dirty="0" err="1"/>
+              <a:t>StratifiedKFold</a:t>
+            </a:r>
+            <a:r>
+              <a:rPr lang="en-US" dirty="0"/>
+              <a:t> CV used to determine best model</a:t>
+            </a:r>
+          </a:p>
+          <a:p>
+            <a:pPr lvl="1"/>
+            <a:r>
+              <a:rPr lang="en-US" dirty="0" err="1"/>
+              <a:t>StandardScalar</a:t>
+            </a:r>
+            <a:r>
+              <a:rPr lang="en-US" dirty="0"/>
+              <a:t> used to normalize data</a:t>
+            </a:r>
+          </a:p>
+          <a:p>
+            <a:pPr lvl="1"/>
+            <a:r>
+              <a:rPr lang="en-US" dirty="0" err="1"/>
+              <a:t>SelectKBest</a:t>
+            </a:r>
+            <a:r>
+              <a:rPr lang="en-US" dirty="0"/>
+              <a:t> used to reduce dimensionality</a:t>
+            </a:r>
+          </a:p>
+          <a:p>
+            <a:pPr lvl="1"/>
+            <a:endParaRPr lang="en-US" dirty="0"/>
+          </a:p>
+          <a:p>
+            <a:r>
+              <a:rPr lang="en-US" dirty="0"/>
+              <a:t>Model Selection (Deep Learning): MLP</a:t>
+            </a:r>
+          </a:p>
+          <a:p>
+            <a:pPr lvl="1"/>
+            <a:r>
+              <a:rPr lang="en-US" dirty="0" err="1"/>
+              <a:t>RepeatedStratifiedKFold</a:t>
+            </a:r>
+            <a:r>
+              <a:rPr lang="en-US" dirty="0"/>
+              <a:t> CV used to determine hyperparameters</a:t>
+            </a:r>
+          </a:p>
+          <a:p>
+            <a:pPr lvl="1"/>
+            <a:r>
+              <a:rPr lang="en-US" dirty="0" err="1"/>
+              <a:t>StandardScalar</a:t>
+            </a:r>
+            <a:r>
+              <a:rPr lang="en-US" dirty="0"/>
+              <a:t> used to normalize data</a:t>
+            </a:r>
+          </a:p>
+          <a:p>
+            <a:pPr lvl="1"/>
+            <a:r>
+              <a:rPr lang="en-US" dirty="0" err="1"/>
+              <a:t>SelectKBest</a:t>
+            </a:r>
+            <a:r>
+              <a:rPr lang="en-US" dirty="0"/>
+              <a:t> used to reduce dimensionality</a:t>
+            </a:r>
+          </a:p>
+          <a:p>
+            <a:pPr lvl="1"/>
+            <a:r>
+              <a:rPr lang="en-US" dirty="0" err="1"/>
+              <a:t>ReLU</a:t>
+            </a:r>
+            <a:r>
+              <a:rPr lang="en-US" dirty="0"/>
+              <a:t> with 0.25 dropout</a:t>
+            </a:r>
+          </a:p>
+          <a:p>
+            <a:pPr lvl="1"/>
+            <a:r>
+              <a:rPr lang="en-US" dirty="0" err="1"/>
+              <a:t>BatchNorm</a:t>
+            </a:r>
+            <a:r>
+              <a:rPr lang="en-US" dirty="0"/>
+              <a:t> used to normalize activations</a:t>
+            </a:r>
+          </a:p>
+          <a:p>
+            <a:pPr lvl="1"/>
+            <a:r>
+              <a:rPr lang="en-US" dirty="0" err="1"/>
+              <a:t>BCEWithLogitsLoss</a:t>
+            </a:r>
+            <a:r>
+              <a:rPr lang="en-US" dirty="0"/>
+              <a:t> used to measure error</a:t>
+            </a:r>
+          </a:p>
+          <a:p>
+            <a:endParaRPr lang="en-US" dirty="0"/>
+          </a:p>
+        </p:txBody>
+      </p:sp>
+    </p:spTree>
+    <p:extLst>
+      <p:ext uri="{BB962C8B-B14F-4D97-AF65-F5344CB8AC3E}">
+        <p14:creationId xmlns:p14="http://schemas.microsoft.com/office/powerpoint/2010/main" val="185969209"/>
+      </p:ext>
+    </p:extLst>
+  </p:cSld>
+  <p:clrMapOvr>
+    <a:masterClrMapping/>
+  </p:clrMapOvr>
+</p:sld>
+</file>
+
+<file path=ppt/slides/slide8.xml><?xml version="1.0" encoding="utf-8"?>
+<p:sld xmlns:a="http://schemas.openxmlformats.org/drawingml/2006/main" xmlns:r="http://schemas.openxmlformats.org/officeDocument/2006/relationships" xmlns:p="http://schemas.openxmlformats.org/presentationml/2006/main">
+  <p:cSld>
+    <p:spTree>
+      <p:nvGrpSpPr>
+        <p:cNvPr id="1" name=""/>
+        <p:cNvGrpSpPr/>
+        <p:nvPr/>
+      </p:nvGrpSpPr>
+      <p:grpSpPr>
+        <a:xfrm>
+          <a:off x="0" y="0"/>
+          <a:ext cx="0" cy="0"/>
+          <a:chOff x="0" y="0"/>
+          <a:chExt cx="0" cy="0"/>
+        </a:xfrm>
+      </p:grpSpPr>
+      <p:sp>
+        <p:nvSpPr>
+          <p:cNvPr id="2" name="Title 1">
+            <a:extLst>
+              <a:ext uri="{FF2B5EF4-FFF2-40B4-BE49-F238E27FC236}">
+                <a16:creationId xmlns:a16="http://schemas.microsoft.com/office/drawing/2014/main" id="{64AD0586-234F-A455-C049-C953A2065E61}"/>
+              </a:ext>
+            </a:extLst>
+          </p:cNvPr>
+          <p:cNvSpPr>
+            <a:spLocks noGrp="1"/>
+          </p:cNvSpPr>
+          <p:nvPr>
+            <p:ph type="title"/>
+          </p:nvPr>
+        </p:nvSpPr>
+        <p:spPr/>
+        <p:txBody>
+          <a:bodyPr/>
+          <a:lstStyle/>
+          <a:p>
+            <a:r>
+              <a:rPr lang="en-US" dirty="0"/>
+              <a:t>Part 2 – Results</a:t>
+            </a:r>
+          </a:p>
+        </p:txBody>
+      </p:sp>
+      <p:sp>
+        <p:nvSpPr>
+          <p:cNvPr id="3" name="Content Placeholder 2">
+            <a:extLst>
+              <a:ext uri="{FF2B5EF4-FFF2-40B4-BE49-F238E27FC236}">
+                <a16:creationId xmlns:a16="http://schemas.microsoft.com/office/drawing/2014/main" id="{561478C8-F244-57BA-FCE1-BB7325332BFE}"/>
+              </a:ext>
+            </a:extLst>
+          </p:cNvPr>
+          <p:cNvSpPr>
+            <a:spLocks noGrp="1"/>
+          </p:cNvSpPr>
+          <p:nvPr>
+            <p:ph idx="1"/>
+          </p:nvPr>
+        </p:nvSpPr>
+        <p:spPr/>
+        <p:txBody>
+          <a:bodyPr/>
+          <a:lstStyle/>
+          <a:p>
+            <a:endParaRPr lang="en-US" dirty="0"/>
+          </a:p>
+        </p:txBody>
+      </p:sp>
+    </p:spTree>
+    <p:extLst>
+      <p:ext uri="{BB962C8B-B14F-4D97-AF65-F5344CB8AC3E}">
+        <p14:creationId xmlns:p14="http://schemas.microsoft.com/office/powerpoint/2010/main" val="373993910"/>
+      </p:ext>
+    </p:extLst>
+  </p:cSld>
+  <p:clrMapOvr>
+    <a:masterClrMapping/>
+  </p:clrMapOvr>
+</p:sld>
+</file>
+
+<file path=ppt/slides/slide9.xml><?xml version="1.0" encoding="utf-8"?>
+<p:sld xmlns:a="http://schemas.openxmlformats.org/drawingml/2006/main" xmlns:r="http://schemas.openxmlformats.org/officeDocument/2006/relationships" xmlns:p="http://schemas.openxmlformats.org/presentationml/2006/main">
+  <p:cSld>
+    <p:spTree>
+      <p:nvGrpSpPr>
+        <p:cNvPr id="1" name=""/>
+        <p:cNvGrpSpPr/>
+        <p:nvPr/>
+      </p:nvGrpSpPr>
+      <p:grpSpPr>
+        <a:xfrm>
+          <a:off x="0" y="0"/>
+          <a:ext cx="0" cy="0"/>
+          <a:chOff x="0" y="0"/>
+          <a:chExt cx="0" cy="0"/>
+        </a:xfrm>
+      </p:grpSpPr>
+      <p:sp>
+        <p:nvSpPr>
+          <p:cNvPr id="2" name="Title 1">
+            <a:extLst>
+              <a:ext uri="{FF2B5EF4-FFF2-40B4-BE49-F238E27FC236}">
+                <a16:creationId xmlns:a16="http://schemas.microsoft.com/office/drawing/2014/main" id="{804B22E2-45CD-80E4-43BD-6E3DC616A6BA}"/>
+              </a:ext>
+            </a:extLst>
+          </p:cNvPr>
+          <p:cNvSpPr>
+            <a:spLocks noGrp="1"/>
+          </p:cNvSpPr>
+          <p:nvPr>
+            <p:ph type="title"/>
+          </p:nvPr>
+        </p:nvSpPr>
+        <p:spPr/>
+        <p:txBody>
+          <a:bodyPr/>
+          <a:lstStyle/>
+          <a:p>
+            <a:r>
+              <a:rPr lang="en-US" dirty="0"/>
+              <a:t>Part </a:t>
+            </a:r>
+            <a:r>
+              <a:rPr lang="en-US"/>
+              <a:t>2 – Conclusion</a:t>
+            </a:r>
+          </a:p>
+        </p:txBody>
+      </p:sp>
+      <p:sp>
+        <p:nvSpPr>
+          <p:cNvPr id="3" name="Content Placeholder 2">
+            <a:extLst>
+              <a:ext uri="{FF2B5EF4-FFF2-40B4-BE49-F238E27FC236}">
+                <a16:creationId xmlns:a16="http://schemas.microsoft.com/office/drawing/2014/main" id="{9A469714-4927-D2FD-DF64-9AC206900752}"/>
+              </a:ext>
+            </a:extLst>
+          </p:cNvPr>
+          <p:cNvSpPr>
+            <a:spLocks noGrp="1"/>
+          </p:cNvSpPr>
+          <p:nvPr>
+            <p:ph idx="1"/>
+          </p:nvPr>
+        </p:nvSpPr>
+        <p:spPr/>
+        <p:txBody>
+          <a:bodyPr/>
+          <a:lstStyle/>
+          <a:p>
+            <a:endParaRPr lang="en-US"/>
+          </a:p>
+        </p:txBody>
+      </p:sp>
+    </p:spTree>
+    <p:extLst>
+      <p:ext uri="{BB962C8B-B14F-4D97-AF65-F5344CB8AC3E}">
+        <p14:creationId xmlns:p14="http://schemas.microsoft.com/office/powerpoint/2010/main" val="1077775097"/>
       </p:ext>
     </p:extLst>
   </p:cSld>

--- a/Documentation/Final Presentation.pptx
+++ b/Documentation/Final Presentation.pptx
@@ -6098,8 +6098,13 @@
           <a:p>
             <a:r>
               <a:rPr lang="en-US" dirty="0"/>
-              <a:t>Part 1a - Approach </a:t>
-            </a:r>
+              <a:t>Part </a:t>
+            </a:r>
+            <a:r>
+              <a:rPr lang="en-US"/>
+              <a:t>1a – Approach</a:t>
+            </a:r>
+            <a:endParaRPr lang="en-US" dirty="0"/>
           </a:p>
         </p:txBody>
       </p:sp>
@@ -6264,7 +6269,7 @@
           <a:p>
             <a:r>
               <a:rPr lang="en-US" dirty="0"/>
-              <a:t>Part 1a - Results</a:t>
+              <a:t>Part 1a – Results</a:t>
             </a:r>
           </a:p>
         </p:txBody>
@@ -6390,7 +6395,7 @@
           <a:p>
             <a:r>
               <a:rPr lang="en-US" dirty="0"/>
-              <a:t>Part 1b - Approach </a:t>
+              <a:t>Part 1b – Approach</a:t>
             </a:r>
           </a:p>
         </p:txBody>
@@ -6487,7 +6492,7 @@
           <a:p>
             <a:r>
               <a:rPr lang="en-US" dirty="0"/>
-              <a:t>Part 1b - Results</a:t>
+              <a:t>Part 1b – Results</a:t>
             </a:r>
           </a:p>
         </p:txBody>
@@ -7001,7 +7006,27 @@
           <a:bodyPr/>
           <a:lstStyle/>
           <a:p>
-            <a:endParaRPr lang="en-US"/>
+            <a:r>
+              <a:rPr lang="en-US" dirty="0"/>
+              <a:t>High dimensional, low sample count data is difficult to work with</a:t>
+            </a:r>
+          </a:p>
+          <a:p>
+            <a:pPr lvl="1"/>
+            <a:r>
+              <a:rPr lang="en-US" dirty="0"/>
+              <a:t>Synthesizing data may not always work</a:t>
+            </a:r>
+          </a:p>
+          <a:p>
+            <a:pPr lvl="1"/>
+            <a:endParaRPr lang="en-US" dirty="0"/>
+          </a:p>
+          <a:p>
+            <a:r>
+              <a:rPr lang="en-US" dirty="0"/>
+              <a:t>Deep learning can be highly adaptable in ways even the best traditional learning methods aren’t</a:t>
+            </a:r>
           </a:p>
         </p:txBody>
       </p:sp>

--- a/Documentation/Final Presentation.pptx
+++ b/Documentation/Final Presentation.pptx
@@ -4,6 +4,9 @@
   <p:sldMasterIdLst>
     <p:sldMasterId id="2147483712" r:id="rId1"/>
   </p:sldMasterIdLst>
+  <p:notesMasterIdLst>
+    <p:notesMasterId r:id="rId12"/>
+  </p:notesMasterIdLst>
   <p:sldIdLst>
     <p:sldId id="256" r:id="rId2"/>
     <p:sldId id="257" r:id="rId3"/>
@@ -119,6 +122,462 @@
     </p:ext>
   </p:extLst>
 </p:presentation>
+</file>
+
+<file path=ppt/notesMasters/notesMaster1.xml><?xml version="1.0" encoding="utf-8"?>
+<p:notesMaster xmlns:a="http://schemas.openxmlformats.org/drawingml/2006/main" xmlns:r="http://schemas.openxmlformats.org/officeDocument/2006/relationships" xmlns:p="http://schemas.openxmlformats.org/presentationml/2006/main">
+  <p:cSld>
+    <p:bg>
+      <p:bgRef idx="1001">
+        <a:schemeClr val="bg1"/>
+      </p:bgRef>
+    </p:bg>
+    <p:spTree>
+      <p:nvGrpSpPr>
+        <p:cNvPr id="1" name=""/>
+        <p:cNvGrpSpPr/>
+        <p:nvPr/>
+      </p:nvGrpSpPr>
+      <p:grpSpPr>
+        <a:xfrm>
+          <a:off x="0" y="0"/>
+          <a:ext cx="0" cy="0"/>
+          <a:chOff x="0" y="0"/>
+          <a:chExt cx="0" cy="0"/>
+        </a:xfrm>
+      </p:grpSpPr>
+      <p:sp>
+        <p:nvSpPr>
+          <p:cNvPr id="2" name="Header Placeholder 1"/>
+          <p:cNvSpPr>
+            <a:spLocks noGrp="1"/>
+          </p:cNvSpPr>
+          <p:nvPr>
+            <p:ph type="hdr" sz="quarter"/>
+          </p:nvPr>
+        </p:nvSpPr>
+        <p:spPr>
+          <a:xfrm>
+            <a:off x="0" y="0"/>
+            <a:ext cx="2971800" cy="458788"/>
+          </a:xfrm>
+          <a:prstGeom prst="rect">
+            <a:avLst/>
+          </a:prstGeom>
+        </p:spPr>
+        <p:txBody>
+          <a:bodyPr vert="horz" lIns="91440" tIns="45720" rIns="91440" bIns="45720" rtlCol="0"/>
+          <a:lstStyle>
+            <a:lvl1pPr algn="l">
+              <a:defRPr sz="1200"/>
+            </a:lvl1pPr>
+          </a:lstStyle>
+          <a:p>
+            <a:endParaRPr lang="en-US"/>
+          </a:p>
+        </p:txBody>
+      </p:sp>
+      <p:sp>
+        <p:nvSpPr>
+          <p:cNvPr id="3" name="Date Placeholder 2"/>
+          <p:cNvSpPr>
+            <a:spLocks noGrp="1"/>
+          </p:cNvSpPr>
+          <p:nvPr>
+            <p:ph type="dt" idx="1"/>
+          </p:nvPr>
+        </p:nvSpPr>
+        <p:spPr>
+          <a:xfrm>
+            <a:off x="3884613" y="0"/>
+            <a:ext cx="2971800" cy="458788"/>
+          </a:xfrm>
+          <a:prstGeom prst="rect">
+            <a:avLst/>
+          </a:prstGeom>
+        </p:spPr>
+        <p:txBody>
+          <a:bodyPr vert="horz" lIns="91440" tIns="45720" rIns="91440" bIns="45720" rtlCol="0"/>
+          <a:lstStyle>
+            <a:lvl1pPr algn="r">
+              <a:defRPr sz="1200"/>
+            </a:lvl1pPr>
+          </a:lstStyle>
+          <a:p>
+            <a:fld id="{C3980169-19F0-42C0-8076-020E1C68FFA6}" type="datetimeFigureOut">
+              <a:rPr lang="en-US" smtClean="0"/>
+              <a:t>5/10/2026</a:t>
+            </a:fld>
+            <a:endParaRPr lang="en-US"/>
+          </a:p>
+        </p:txBody>
+      </p:sp>
+      <p:sp>
+        <p:nvSpPr>
+          <p:cNvPr id="4" name="Slide Image Placeholder 3"/>
+          <p:cNvSpPr>
+            <a:spLocks noGrp="1" noRot="1" noChangeAspect="1"/>
+          </p:cNvSpPr>
+          <p:nvPr>
+            <p:ph type="sldImg" idx="2"/>
+          </p:nvPr>
+        </p:nvSpPr>
+        <p:spPr>
+          <a:xfrm>
+            <a:off x="685800" y="1143000"/>
+            <a:ext cx="5486400" cy="3086100"/>
+          </a:xfrm>
+          <a:prstGeom prst="rect">
+            <a:avLst/>
+          </a:prstGeom>
+          <a:noFill/>
+          <a:ln w="12700">
+            <a:solidFill>
+              <a:prstClr val="black"/>
+            </a:solidFill>
+          </a:ln>
+        </p:spPr>
+        <p:txBody>
+          <a:bodyPr vert="horz" lIns="91440" tIns="45720" rIns="91440" bIns="45720" rtlCol="0" anchor="ctr"/>
+          <a:lstStyle/>
+          <a:p>
+            <a:endParaRPr lang="en-US"/>
+          </a:p>
+        </p:txBody>
+      </p:sp>
+      <p:sp>
+        <p:nvSpPr>
+          <p:cNvPr id="5" name="Notes Placeholder 4"/>
+          <p:cNvSpPr>
+            <a:spLocks noGrp="1"/>
+          </p:cNvSpPr>
+          <p:nvPr>
+            <p:ph type="body" sz="quarter" idx="3"/>
+          </p:nvPr>
+        </p:nvSpPr>
+        <p:spPr>
+          <a:xfrm>
+            <a:off x="685800" y="4400550"/>
+            <a:ext cx="5486400" cy="3600450"/>
+          </a:xfrm>
+          <a:prstGeom prst="rect">
+            <a:avLst/>
+          </a:prstGeom>
+        </p:spPr>
+        <p:txBody>
+          <a:bodyPr vert="horz" lIns="91440" tIns="45720" rIns="91440" bIns="45720" rtlCol="0"/>
+          <a:lstStyle/>
+          <a:p>
+            <a:pPr lvl="0"/>
+            <a:r>
+              <a:rPr lang="en-US"/>
+              <a:t>Click to edit Master text styles</a:t>
+            </a:r>
+          </a:p>
+          <a:p>
+            <a:pPr lvl="1"/>
+            <a:r>
+              <a:rPr lang="en-US"/>
+              <a:t>Second level</a:t>
+            </a:r>
+          </a:p>
+          <a:p>
+            <a:pPr lvl="2"/>
+            <a:r>
+              <a:rPr lang="en-US"/>
+              <a:t>Third level</a:t>
+            </a:r>
+          </a:p>
+          <a:p>
+            <a:pPr lvl="3"/>
+            <a:r>
+              <a:rPr lang="en-US"/>
+              <a:t>Fourth level</a:t>
+            </a:r>
+          </a:p>
+          <a:p>
+            <a:pPr lvl="4"/>
+            <a:r>
+              <a:rPr lang="en-US"/>
+              <a:t>Fifth level</a:t>
+            </a:r>
+          </a:p>
+        </p:txBody>
+      </p:sp>
+      <p:sp>
+        <p:nvSpPr>
+          <p:cNvPr id="6" name="Footer Placeholder 5"/>
+          <p:cNvSpPr>
+            <a:spLocks noGrp="1"/>
+          </p:cNvSpPr>
+          <p:nvPr>
+            <p:ph type="ftr" sz="quarter" idx="4"/>
+          </p:nvPr>
+        </p:nvSpPr>
+        <p:spPr>
+          <a:xfrm>
+            <a:off x="0" y="8685213"/>
+            <a:ext cx="2971800" cy="458787"/>
+          </a:xfrm>
+          <a:prstGeom prst="rect">
+            <a:avLst/>
+          </a:prstGeom>
+        </p:spPr>
+        <p:txBody>
+          <a:bodyPr vert="horz" lIns="91440" tIns="45720" rIns="91440" bIns="45720" rtlCol="0" anchor="b"/>
+          <a:lstStyle>
+            <a:lvl1pPr algn="l">
+              <a:defRPr sz="1200"/>
+            </a:lvl1pPr>
+          </a:lstStyle>
+          <a:p>
+            <a:endParaRPr lang="en-US"/>
+          </a:p>
+        </p:txBody>
+      </p:sp>
+      <p:sp>
+        <p:nvSpPr>
+          <p:cNvPr id="7" name="Slide Number Placeholder 6"/>
+          <p:cNvSpPr>
+            <a:spLocks noGrp="1"/>
+          </p:cNvSpPr>
+          <p:nvPr>
+            <p:ph type="sldNum" sz="quarter" idx="5"/>
+          </p:nvPr>
+        </p:nvSpPr>
+        <p:spPr>
+          <a:xfrm>
+            <a:off x="3884613" y="8685213"/>
+            <a:ext cx="2971800" cy="458787"/>
+          </a:xfrm>
+          <a:prstGeom prst="rect">
+            <a:avLst/>
+          </a:prstGeom>
+        </p:spPr>
+        <p:txBody>
+          <a:bodyPr vert="horz" lIns="91440" tIns="45720" rIns="91440" bIns="45720" rtlCol="0" anchor="b"/>
+          <a:lstStyle>
+            <a:lvl1pPr algn="r">
+              <a:defRPr sz="1200"/>
+            </a:lvl1pPr>
+          </a:lstStyle>
+          <a:p>
+            <a:fld id="{3A6D4FA5-9B1B-4DF8-A772-70222F2067D9}" type="slidenum">
+              <a:rPr lang="en-US" smtClean="0"/>
+              <a:t>‹#›</a:t>
+            </a:fld>
+            <a:endParaRPr lang="en-US"/>
+          </a:p>
+        </p:txBody>
+      </p:sp>
+    </p:spTree>
+    <p:extLst>
+      <p:ext uri="{BB962C8B-B14F-4D97-AF65-F5344CB8AC3E}">
+        <p14:creationId xmlns:p14="http://schemas.microsoft.com/office/powerpoint/2010/main" val="2389842023"/>
+      </p:ext>
+    </p:extLst>
+  </p:cSld>
+  <p:clrMap bg1="lt1" tx1="dk1" bg2="lt2" tx2="dk2" accent1="accent1" accent2="accent2" accent3="accent3" accent4="accent4" accent5="accent5" accent6="accent6" hlink="hlink" folHlink="folHlink"/>
+  <p:notesStyle>
+    <a:lvl1pPr marL="0" algn="l" defTabSz="914400" rtl="0" eaLnBrk="1" latinLnBrk="0" hangingPunct="1">
+      <a:defRPr sz="1200" kern="1200">
+        <a:solidFill>
+          <a:schemeClr val="tx1"/>
+        </a:solidFill>
+        <a:latin typeface="+mn-lt"/>
+        <a:ea typeface="+mn-ea"/>
+        <a:cs typeface="+mn-cs"/>
+      </a:defRPr>
+    </a:lvl1pPr>
+    <a:lvl2pPr marL="457200" algn="l" defTabSz="914400" rtl="0" eaLnBrk="1" latinLnBrk="0" hangingPunct="1">
+      <a:defRPr sz="1200" kern="1200">
+        <a:solidFill>
+          <a:schemeClr val="tx1"/>
+        </a:solidFill>
+        <a:latin typeface="+mn-lt"/>
+        <a:ea typeface="+mn-ea"/>
+        <a:cs typeface="+mn-cs"/>
+      </a:defRPr>
+    </a:lvl2pPr>
+    <a:lvl3pPr marL="914400" algn="l" defTabSz="914400" rtl="0" eaLnBrk="1" latinLnBrk="0" hangingPunct="1">
+      <a:defRPr sz="1200" kern="1200">
+        <a:solidFill>
+          <a:schemeClr val="tx1"/>
+        </a:solidFill>
+        <a:latin typeface="+mn-lt"/>
+        <a:ea typeface="+mn-ea"/>
+        <a:cs typeface="+mn-cs"/>
+      </a:defRPr>
+    </a:lvl3pPr>
+    <a:lvl4pPr marL="1371600" algn="l" defTabSz="914400" rtl="0" eaLnBrk="1" latinLnBrk="0" hangingPunct="1">
+      <a:defRPr sz="1200" kern="1200">
+        <a:solidFill>
+          <a:schemeClr val="tx1"/>
+        </a:solidFill>
+        <a:latin typeface="+mn-lt"/>
+        <a:ea typeface="+mn-ea"/>
+        <a:cs typeface="+mn-cs"/>
+      </a:defRPr>
+    </a:lvl4pPr>
+    <a:lvl5pPr marL="1828800" algn="l" defTabSz="914400" rtl="0" eaLnBrk="1" latinLnBrk="0" hangingPunct="1">
+      <a:defRPr sz="1200" kern="1200">
+        <a:solidFill>
+          <a:schemeClr val="tx1"/>
+        </a:solidFill>
+        <a:latin typeface="+mn-lt"/>
+        <a:ea typeface="+mn-ea"/>
+        <a:cs typeface="+mn-cs"/>
+      </a:defRPr>
+    </a:lvl5pPr>
+    <a:lvl6pPr marL="2286000" algn="l" defTabSz="914400" rtl="0" eaLnBrk="1" latinLnBrk="0" hangingPunct="1">
+      <a:defRPr sz="1200" kern="1200">
+        <a:solidFill>
+          <a:schemeClr val="tx1"/>
+        </a:solidFill>
+        <a:latin typeface="+mn-lt"/>
+        <a:ea typeface="+mn-ea"/>
+        <a:cs typeface="+mn-cs"/>
+      </a:defRPr>
+    </a:lvl6pPr>
+    <a:lvl7pPr marL="2743200" algn="l" defTabSz="914400" rtl="0" eaLnBrk="1" latinLnBrk="0" hangingPunct="1">
+      <a:defRPr sz="1200" kern="1200">
+        <a:solidFill>
+          <a:schemeClr val="tx1"/>
+        </a:solidFill>
+        <a:latin typeface="+mn-lt"/>
+        <a:ea typeface="+mn-ea"/>
+        <a:cs typeface="+mn-cs"/>
+      </a:defRPr>
+    </a:lvl7pPr>
+    <a:lvl8pPr marL="3200400" algn="l" defTabSz="914400" rtl="0" eaLnBrk="1" latinLnBrk="0" hangingPunct="1">
+      <a:defRPr sz="1200" kern="1200">
+        <a:solidFill>
+          <a:schemeClr val="tx1"/>
+        </a:solidFill>
+        <a:latin typeface="+mn-lt"/>
+        <a:ea typeface="+mn-ea"/>
+        <a:cs typeface="+mn-cs"/>
+      </a:defRPr>
+    </a:lvl8pPr>
+    <a:lvl9pPr marL="3657600" algn="l" defTabSz="914400" rtl="0" eaLnBrk="1" latinLnBrk="0" hangingPunct="1">
+      <a:defRPr sz="1200" kern="1200">
+        <a:solidFill>
+          <a:schemeClr val="tx1"/>
+        </a:solidFill>
+        <a:latin typeface="+mn-lt"/>
+        <a:ea typeface="+mn-ea"/>
+        <a:cs typeface="+mn-cs"/>
+      </a:defRPr>
+    </a:lvl9pPr>
+  </p:notesStyle>
+</p:notesMaster>
+</file>
+
+<file path=ppt/notesSlides/notesSlide1.xml><?xml version="1.0" encoding="utf-8"?>
+<p:notes xmlns:a="http://schemas.openxmlformats.org/drawingml/2006/main" xmlns:r="http://schemas.openxmlformats.org/officeDocument/2006/relationships" xmlns:p="http://schemas.openxmlformats.org/presentationml/2006/main">
+  <p:cSld>
+    <p:spTree>
+      <p:nvGrpSpPr>
+        <p:cNvPr id="1" name=""/>
+        <p:cNvGrpSpPr/>
+        <p:nvPr/>
+      </p:nvGrpSpPr>
+      <p:grpSpPr>
+        <a:xfrm>
+          <a:off x="0" y="0"/>
+          <a:ext cx="0" cy="0"/>
+          <a:chOff x="0" y="0"/>
+          <a:chExt cx="0" cy="0"/>
+        </a:xfrm>
+      </p:grpSpPr>
+      <p:sp>
+        <p:nvSpPr>
+          <p:cNvPr id="2" name="Slide Image Placeholder 1"/>
+          <p:cNvSpPr>
+            <a:spLocks noGrp="1" noRot="1" noChangeAspect="1"/>
+          </p:cNvSpPr>
+          <p:nvPr>
+            <p:ph type="sldImg"/>
+          </p:nvPr>
+        </p:nvSpPr>
+        <p:spPr/>
+      </p:sp>
+      <p:sp>
+        <p:nvSpPr>
+          <p:cNvPr id="3" name="Notes Placeholder 2"/>
+          <p:cNvSpPr>
+            <a:spLocks noGrp="1"/>
+          </p:cNvSpPr>
+          <p:nvPr>
+            <p:ph type="body" idx="1"/>
+          </p:nvPr>
+        </p:nvSpPr>
+        <p:spPr/>
+        <p:txBody>
+          <a:bodyPr/>
+          <a:lstStyle/>
+          <a:p>
+            <a:pPr marL="228600" indent="-228600">
+              <a:buAutoNum type="arabicPeriod"/>
+            </a:pPr>
+            <a:r>
+              <a:rPr lang="en-US" dirty="0"/>
+              <a:t>The dataset was 4:1 imbalanced, very high dimensional but very low sample count</a:t>
+            </a:r>
+          </a:p>
+          <a:p>
+            <a:pPr marL="228600" indent="-228600">
+              <a:buAutoNum type="arabicPeriod"/>
+            </a:pPr>
+            <a:r>
+              <a:rPr lang="en-US" dirty="0"/>
+              <a:t>PCA was initially used instead of </a:t>
+            </a:r>
+            <a:r>
+              <a:rPr lang="en-US" dirty="0" err="1"/>
+              <a:t>SelectKBest</a:t>
+            </a:r>
+            <a:r>
+              <a:rPr lang="en-US" dirty="0"/>
+              <a:t>, but the features that explained the most variance were not the most predictive</a:t>
+            </a:r>
+          </a:p>
+        </p:txBody>
+      </p:sp>
+      <p:sp>
+        <p:nvSpPr>
+          <p:cNvPr id="4" name="Slide Number Placeholder 3"/>
+          <p:cNvSpPr>
+            <a:spLocks noGrp="1"/>
+          </p:cNvSpPr>
+          <p:nvPr>
+            <p:ph type="sldNum" sz="quarter" idx="5"/>
+          </p:nvPr>
+        </p:nvSpPr>
+        <p:spPr/>
+        <p:txBody>
+          <a:bodyPr/>
+          <a:lstStyle/>
+          <a:p>
+            <a:fld id="{3A6D4FA5-9B1B-4DF8-A772-70222F2067D9}" type="slidenum">
+              <a:rPr lang="en-US" smtClean="0"/>
+              <a:t>7</a:t>
+            </a:fld>
+            <a:endParaRPr lang="en-US"/>
+          </a:p>
+        </p:txBody>
+      </p:sp>
+    </p:spTree>
+    <p:extLst>
+      <p:ext uri="{BB962C8B-B14F-4D97-AF65-F5344CB8AC3E}">
+        <p14:creationId xmlns:p14="http://schemas.microsoft.com/office/powerpoint/2010/main" val="1838617706"/>
+      </p:ext>
+    </p:extLst>
+  </p:cSld>
+  <p:clrMapOvr>
+    <a:masterClrMapping/>
+  </p:clrMapOvr>
+</p:notes>
 </file>
 
 <file path=ppt/slideLayouts/slideLayout1.xml><?xml version="1.0" encoding="utf-8"?>
@@ -6098,13 +6557,8 @@
           <a:p>
             <a:r>
               <a:rPr lang="en-US" dirty="0"/>
-              <a:t>Part </a:t>
-            </a:r>
-            <a:r>
-              <a:rPr lang="en-US"/>
-              <a:t>1a – Approach</a:t>
-            </a:r>
-            <a:endParaRPr lang="en-US" dirty="0"/>
+              <a:t>Part 1a – Approach</a:t>
+            </a:r>
           </a:p>
         </p:txBody>
       </p:sp>
@@ -6709,7 +7163,12 @@
             <p:ph idx="1"/>
           </p:nvPr>
         </p:nvSpPr>
-        <p:spPr/>
+        <p:spPr>
+          <a:xfrm>
+            <a:off x="838200" y="1825625"/>
+            <a:ext cx="10515600" cy="4667250"/>
+          </a:xfrm>
+        </p:spPr>
         <p:txBody>
           <a:bodyPr>
             <a:normAutofit fontScale="92500" lnSpcReduction="20000"/>
@@ -6916,10 +7375,63 @@
         </p:nvSpPr>
         <p:spPr/>
         <p:txBody>
-          <a:bodyPr/>
-          <a:lstStyle/>
-          <a:p>
-            <a:endParaRPr lang="en-US" dirty="0"/>
+          <a:bodyPr>
+            <a:normAutofit/>
+          </a:bodyPr>
+          <a:lstStyle/>
+          <a:p>
+            <a:r>
+              <a:rPr lang="en-US" dirty="0"/>
+              <a:t>Deep learning model selected for analysis</a:t>
+            </a:r>
+          </a:p>
+          <a:p>
+            <a:r>
+              <a:rPr lang="en-US" dirty="0"/>
+              <a:t>Fifteen-fold repeated CV results (80%)</a:t>
+            </a:r>
+          </a:p>
+          <a:p>
+            <a:pPr lvl="1"/>
+            <a:r>
+              <a:rPr lang="en-US" dirty="0"/>
+              <a:t>Mean AUC-ROC of 0.706</a:t>
+            </a:r>
+          </a:p>
+          <a:p>
+            <a:pPr lvl="1"/>
+            <a:r>
+              <a:rPr lang="en-US" dirty="0"/>
+              <a:t>Mean F1 score of 0.758</a:t>
+            </a:r>
+          </a:p>
+          <a:p>
+            <a:r>
+              <a:rPr lang="en-US" dirty="0"/>
+              <a:t>Performance on </a:t>
+            </a:r>
+            <a:r>
+              <a:rPr lang="en-US"/>
+              <a:t>training set (predicted </a:t>
+            </a:r>
+            <a:r>
+              <a:rPr lang="en-US" dirty="0"/>
+              <a:t>Results on test set)</a:t>
+            </a:r>
+          </a:p>
+          <a:p>
+            <a:pPr lvl="1"/>
+            <a:r>
+              <a:rPr lang="en-US" dirty="0"/>
+              <a:t>Mean accuracy of 0.7658</a:t>
+            </a:r>
+          </a:p>
+          <a:p>
+            <a:pPr lvl="1"/>
+            <a:r>
+              <a:rPr lang="en-US" dirty="0"/>
+              <a:t>Mean F1 score of 0.6823</a:t>
+            </a:r>
           </a:p>
         </p:txBody>
       </p:sp>
@@ -7242,4 +7754,319 @@
     </a:ext>
   </a:extLst>
 </a:theme>
+</file>
+
+<file path=ppt/theme/theme2.xml><?xml version="1.0" encoding="utf-8"?>
+<a:theme xmlns:a="http://schemas.openxmlformats.org/drawingml/2006/main" name="Office Theme">
+  <a:themeElements>
+    <a:clrScheme name="Office">
+      <a:dk1>
+        <a:sysClr val="windowText" lastClr="000000"/>
+      </a:dk1>
+      <a:lt1>
+        <a:sysClr val="window" lastClr="FFFFFF"/>
+      </a:lt1>
+      <a:dk2>
+        <a:srgbClr val="0E2841"/>
+      </a:dk2>
+      <a:lt2>
+        <a:srgbClr val="E8E8E8"/>
+      </a:lt2>
+      <a:accent1>
+        <a:srgbClr val="156082"/>
+      </a:accent1>
+      <a:accent2>
+        <a:srgbClr val="E97132"/>
+      </a:accent2>
+      <a:accent3>
+        <a:srgbClr val="196B24"/>
+      </a:accent3>
+      <a:accent4>
+        <a:srgbClr val="0F9ED5"/>
+      </a:accent4>
+      <a:accent5>
+        <a:srgbClr val="A02B93"/>
+      </a:accent5>
+      <a:accent6>
+        <a:srgbClr val="4EA72E"/>
+      </a:accent6>
+      <a:hlink>
+        <a:srgbClr val="467886"/>
+      </a:hlink>
+      <a:folHlink>
+        <a:srgbClr val="96607D"/>
+      </a:folHlink>
+    </a:clrScheme>
+    <a:fontScheme name="Office">
+      <a:majorFont>
+        <a:latin typeface="Aptos Display" panose="02110004020202020204"/>
+        <a:ea typeface=""/>
+        <a:cs typeface=""/>
+        <a:font script="Jpan" typeface="游ゴシック Light"/>
+        <a:font script="Hang" typeface="맑은 고딕"/>
+        <a:font script="Hans" typeface="等线 Light"/>
+        <a:font script="Hant" typeface="新細明體"/>
+        <a:font script="Arab" typeface="Times New Roman"/>
+        <a:font script="Hebr" typeface="Times New Roman"/>
+        <a:font script="Thai" typeface="Angsana New"/>
+        <a:font script="Ethi" typeface="Nyala"/>
+        <a:font script="Beng" typeface="Vrinda"/>
+        <a:font script="Gujr" typeface="Shruti"/>
+        <a:font script="Khmr" typeface="MoolBoran"/>
+        <a:font script="Knda" typeface="Tunga"/>
+        <a:font script="Guru" typeface="Raavi"/>
+        <a:font script="Cans" typeface="Euphemia"/>
+        <a:font script="Cher" typeface="Plantagenet Cherokee"/>
+        <a:font script="Yiii" typeface="Microsoft Yi Baiti"/>
+        <a:font script="Tibt" typeface="Microsoft Himalaya"/>
+        <a:font script="Thaa" typeface="MV Boli"/>
+        <a:font script="Deva" typeface="Mangal"/>
+        <a:font script="Telu" typeface="Gautami"/>
+        <a:font script="Taml" typeface="Latha"/>
+        <a:font script="Syrc" typeface="Estrangelo Edessa"/>
+        <a:font script="Orya" typeface="Kalinga"/>
+        <a:font script="Mlym" typeface="Kartika"/>
+        <a:font script="Laoo" typeface="DokChampa"/>
+        <a:font script="Sinh" typeface="Iskoola Pota"/>
+        <a:font script="Mong" typeface="Mongolian Baiti"/>
+        <a:font script="Viet" typeface="Times New Roman"/>
+        <a:font script="Uigh" typeface="Microsoft Uighur"/>
+        <a:font script="Geor" typeface="Sylfaen"/>
+        <a:font script="Armn" typeface="Arial"/>
+        <a:font script="Bugi" typeface="Leelawadee UI"/>
+        <a:font script="Bopo" typeface="Microsoft JhengHei"/>
+        <a:font script="Java" typeface="Javanese Text"/>
+        <a:font script="Lisu" typeface="Segoe UI"/>
+        <a:font script="Mymr" typeface="Myanmar Text"/>
+        <a:font script="Nkoo" typeface="Ebrima"/>
+        <a:font script="Olck" typeface="Nirmala UI"/>
+        <a:font script="Osma" typeface="Ebrima"/>
+        <a:font script="Phag" typeface="Phagspa"/>
+        <a:font script="Syrn" typeface="Estrangelo Edessa"/>
+        <a:font script="Syrj" typeface="Estrangelo Edessa"/>
+        <a:font script="Syre" typeface="Estrangelo Edessa"/>
+        <a:font script="Sora" typeface="Nirmala UI"/>
+        <a:font script="Tale" typeface="Microsoft Tai Le"/>
+        <a:font script="Talu" typeface="Microsoft New Tai Lue"/>
+        <a:font script="Tfng" typeface="Ebrima"/>
+      </a:majorFont>
+      <a:minorFont>
+        <a:latin typeface="Aptos" panose="02110004020202020204"/>
+        <a:ea typeface=""/>
+        <a:cs typeface=""/>
+        <a:font script="Jpan" typeface="游ゴシック"/>
+        <a:font script="Hang" typeface="맑은 고딕"/>
+        <a:font script="Hans" typeface="等线"/>
+        <a:font script="Hant" typeface="新細明體"/>
+        <a:font script="Arab" typeface="Arial"/>
+        <a:font script="Hebr" typeface="Arial"/>
+        <a:font script="Thai" typeface="Cordia New"/>
+        <a:font script="Ethi" typeface="Nyala"/>
+        <a:font script="Beng" typeface="Vrinda"/>
+        <a:font script="Gujr" typeface="Shruti"/>
+        <a:font script="Khmr" typeface="DaunPenh"/>
+        <a:font script="Knda" typeface="Tunga"/>
+        <a:font script="Guru" typeface="Raavi"/>
+        <a:font script="Cans" typeface="Euphemia"/>
+        <a:font script="Cher" typeface="Plantagenet Cherokee"/>
+        <a:font script="Yiii" typeface="Microsoft Yi Baiti"/>
+        <a:font script="Tibt" typeface="Microsoft Himalaya"/>
+        <a:font script="Thaa" typeface="MV Boli"/>
+        <a:font script="Deva" typeface="Mangal"/>
+        <a:font script="Telu" typeface="Gautami"/>
+        <a:font script="Taml" typeface="Latha"/>
+        <a:font script="Syrc" typeface="Estrangelo Edessa"/>
+        <a:font script="Orya" typeface="Kalinga"/>
+        <a:font script="Mlym" typeface="Kartika"/>
+        <a:font script="Laoo" typeface="DokChampa"/>
+        <a:font script="Sinh" typeface="Iskoola Pota"/>
+        <a:font script="Mong" typeface="Mongolian Baiti"/>
+        <a:font script="Viet" typeface="Arial"/>
+        <a:font script="Uigh" typeface="Microsoft Uighur"/>
+        <a:font script="Geor" typeface="Sylfaen"/>
+        <a:font script="Armn" typeface="Arial"/>
+        <a:font script="Bugi" typeface="Leelawadee UI"/>
+        <a:font script="Bopo" typeface="Microsoft JhengHei"/>
+        <a:font script="Java" typeface="Javanese Text"/>
+        <a:font script="Lisu" typeface="Segoe UI"/>
+        <a:font script="Mymr" typeface="Myanmar Text"/>
+        <a:font script="Nkoo" typeface="Ebrima"/>
+        <a:font script="Olck" typeface="Nirmala UI"/>
+        <a:font script="Osma" typeface="Ebrima"/>
+        <a:font script="Phag" typeface="Phagspa"/>
+        <a:font script="Syrn" typeface="Estrangelo Edessa"/>
+        <a:font script="Syrj" typeface="Estrangelo Edessa"/>
+        <a:font script="Syre" typeface="Estrangelo Edessa"/>
+        <a:font script="Sora" typeface="Nirmala UI"/>
+        <a:font script="Tale" typeface="Microsoft Tai Le"/>
+        <a:font script="Talu" typeface="Microsoft New Tai Lue"/>
+        <a:font script="Tfng" typeface="Ebrima"/>
+      </a:minorFont>
+    </a:fontScheme>
+    <a:fmtScheme name="Office">
+      <a:fillStyleLst>
+        <a:solidFill>
+          <a:schemeClr val="phClr"/>
+        </a:solidFill>
+        <a:gradFill rotWithShape="1">
+          <a:gsLst>
+            <a:gs pos="0">
+              <a:schemeClr val="phClr">
+                <a:lumMod val="110000"/>
+                <a:satMod val="105000"/>
+                <a:tint val="67000"/>
+              </a:schemeClr>
+            </a:gs>
+            <a:gs pos="50000">
+              <a:schemeClr val="phClr">
+                <a:lumMod val="105000"/>
+                <a:satMod val="103000"/>
+                <a:tint val="73000"/>
+              </a:schemeClr>
+            </a:gs>
+            <a:gs pos="100000">
+              <a:schemeClr val="phClr">
+                <a:lumMod val="105000"/>
+                <a:satMod val="109000"/>
+                <a:tint val="81000"/>
+              </a:schemeClr>
+            </a:gs>
+          </a:gsLst>
+          <a:lin ang="5400000" scaled="0"/>
+        </a:gradFill>
+        <a:gradFill rotWithShape="1">
+          <a:gsLst>
+            <a:gs pos="0">
+              <a:schemeClr val="phClr">
+                <a:satMod val="103000"/>
+                <a:lumMod val="102000"/>
+                <a:tint val="94000"/>
+              </a:schemeClr>
+            </a:gs>
+            <a:gs pos="50000">
+              <a:schemeClr val="phClr">
+                <a:satMod val="110000"/>
+                <a:lumMod val="100000"/>
+                <a:shade val="100000"/>
+              </a:schemeClr>
+            </a:gs>
+            <a:gs pos="100000">
+              <a:schemeClr val="phClr">
+                <a:lumMod val="99000"/>
+                <a:satMod val="120000"/>
+                <a:shade val="78000"/>
+              </a:schemeClr>
+            </a:gs>
+          </a:gsLst>
+          <a:lin ang="5400000" scaled="0"/>
+        </a:gradFill>
+      </a:fillStyleLst>
+      <a:lnStyleLst>
+        <a:ln w="12700" cap="flat" cmpd="sng" algn="ctr">
+          <a:solidFill>
+            <a:schemeClr val="phClr"/>
+          </a:solidFill>
+          <a:prstDash val="solid"/>
+          <a:miter lim="800000"/>
+        </a:ln>
+        <a:ln w="19050" cap="flat" cmpd="sng" algn="ctr">
+          <a:solidFill>
+            <a:schemeClr val="phClr"/>
+          </a:solidFill>
+          <a:prstDash val="solid"/>
+          <a:miter lim="800000"/>
+        </a:ln>
+        <a:ln w="25400" cap="flat" cmpd="sng" algn="ctr">
+          <a:solidFill>
+            <a:schemeClr val="phClr"/>
+          </a:solidFill>
+          <a:prstDash val="solid"/>
+          <a:miter lim="800000"/>
+        </a:ln>
+      </a:lnStyleLst>
+      <a:effectStyleLst>
+        <a:effectStyle>
+          <a:effectLst/>
+        </a:effectStyle>
+        <a:effectStyle>
+          <a:effectLst/>
+        </a:effectStyle>
+        <a:effectStyle>
+          <a:effectLst>
+            <a:outerShdw blurRad="57150" dist="19050" dir="5400000" algn="ctr" rotWithShape="0">
+              <a:srgbClr val="000000">
+                <a:alpha val="63000"/>
+              </a:srgbClr>
+            </a:outerShdw>
+          </a:effectLst>
+        </a:effectStyle>
+      </a:effectStyleLst>
+      <a:bgFillStyleLst>
+        <a:solidFill>
+          <a:schemeClr val="phClr"/>
+        </a:solidFill>
+        <a:solidFill>
+          <a:schemeClr val="phClr">
+            <a:tint val="95000"/>
+            <a:satMod val="170000"/>
+          </a:schemeClr>
+        </a:solidFill>
+        <a:gradFill rotWithShape="1">
+          <a:gsLst>
+            <a:gs pos="0">
+              <a:schemeClr val="phClr">
+                <a:tint val="93000"/>
+                <a:satMod val="150000"/>
+                <a:shade val="98000"/>
+                <a:lumMod val="102000"/>
+              </a:schemeClr>
+            </a:gs>
+            <a:gs pos="50000">
+              <a:schemeClr val="phClr">
+                <a:tint val="98000"/>
+                <a:satMod val="130000"/>
+                <a:shade val="90000"/>
+                <a:lumMod val="103000"/>
+              </a:schemeClr>
+            </a:gs>
+            <a:gs pos="100000">
+              <a:schemeClr val="phClr">
+                <a:shade val="63000"/>
+                <a:satMod val="120000"/>
+              </a:schemeClr>
+            </a:gs>
+          </a:gsLst>
+          <a:lin ang="5400000" scaled="0"/>
+        </a:gradFill>
+      </a:bgFillStyleLst>
+    </a:fmtScheme>
+  </a:themeElements>
+  <a:objectDefaults>
+    <a:lnDef>
+      <a:spPr/>
+      <a:bodyPr/>
+      <a:lstStyle/>
+      <a:style>
+        <a:lnRef idx="2">
+          <a:schemeClr val="accent1"/>
+        </a:lnRef>
+        <a:fillRef idx="0">
+          <a:schemeClr val="accent1"/>
+        </a:fillRef>
+        <a:effectRef idx="1">
+          <a:schemeClr val="accent1"/>
+        </a:effectRef>
+        <a:fontRef idx="minor">
+          <a:schemeClr val="tx1"/>
+        </a:fontRef>
+      </a:style>
+    </a:lnDef>
+  </a:objectDefaults>
+  <a:extraClrSchemeLst/>
+  <a:extLst>
+    <a:ext uri="{05A4C25C-085E-4340-85A3-A5531E510DB2}">
+      <thm15:themeFamily xmlns:thm15="http://schemas.microsoft.com/office/thememl/2012/main" name="Office Theme" id="{2E142A2C-CD16-42D6-873A-C26D2A0506FA}" vid="{1BDDFF52-6CD6-40A5-AB3C-68EB2F1E4D0A}"/>
+    </a:ext>
+  </a:extLst>
+</a:theme>
 </file>
--- a/Documentation/Final Presentation.pptx
+++ b/Documentation/Final Presentation.pptx
@@ -474,6 +474,190 @@
 </file>
 
 <file path=ppt/notesSlides/notesSlide1.xml><?xml version="1.0" encoding="utf-8"?>
+<p:notes xmlns:a="http://schemas.openxmlformats.org/drawingml/2006/main" xmlns:r="http://schemas.openxmlformats.org/officeDocument/2006/relationships" xmlns:p="http://schemas.openxmlformats.org/presentationml/2006/main">
+  <p:cSld>
+    <p:spTree>
+      <p:nvGrpSpPr>
+        <p:cNvPr id="1" name=""/>
+        <p:cNvGrpSpPr/>
+        <p:nvPr/>
+      </p:nvGrpSpPr>
+      <p:grpSpPr>
+        <a:xfrm>
+          <a:off x="0" y="0"/>
+          <a:ext cx="0" cy="0"/>
+          <a:chOff x="0" y="0"/>
+          <a:chExt cx="0" cy="0"/>
+        </a:xfrm>
+      </p:grpSpPr>
+      <p:sp>
+        <p:nvSpPr>
+          <p:cNvPr id="2" name="Slide Image Placeholder 1"/>
+          <p:cNvSpPr>
+            <a:spLocks noGrp="1" noRot="1" noChangeAspect="1"/>
+          </p:cNvSpPr>
+          <p:nvPr>
+            <p:ph type="sldImg"/>
+          </p:nvPr>
+        </p:nvSpPr>
+        <p:spPr/>
+      </p:sp>
+      <p:sp>
+        <p:nvSpPr>
+          <p:cNvPr id="3" name="Notes Placeholder 2"/>
+          <p:cNvSpPr>
+            <a:spLocks noGrp="1"/>
+          </p:cNvSpPr>
+          <p:nvPr>
+            <p:ph type="body" idx="1"/>
+          </p:nvPr>
+        </p:nvSpPr>
+        <p:spPr/>
+        <p:txBody>
+          <a:bodyPr/>
+          <a:lstStyle/>
+          <a:p>
+            <a:r>
+              <a:rPr lang="en-US" dirty="0"/>
+              <a:t>Accuracy due to perfectly balanced classes</a:t>
+            </a:r>
+          </a:p>
+          <a:p>
+            <a:r>
+              <a:rPr lang="en-US" dirty="0"/>
+              <a:t>PCA kept 95% of variance</a:t>
+            </a:r>
+          </a:p>
+        </p:txBody>
+      </p:sp>
+      <p:sp>
+        <p:nvSpPr>
+          <p:cNvPr id="4" name="Slide Number Placeholder 3"/>
+          <p:cNvSpPr>
+            <a:spLocks noGrp="1"/>
+          </p:cNvSpPr>
+          <p:nvPr>
+            <p:ph type="sldNum" sz="quarter" idx="5"/>
+          </p:nvPr>
+        </p:nvSpPr>
+        <p:spPr/>
+        <p:txBody>
+          <a:bodyPr/>
+          <a:lstStyle/>
+          <a:p>
+            <a:fld id="{3A6D4FA5-9B1B-4DF8-A772-70222F2067D9}" type="slidenum">
+              <a:rPr lang="en-US" smtClean="0"/>
+              <a:t>2</a:t>
+            </a:fld>
+            <a:endParaRPr lang="en-US"/>
+          </a:p>
+        </p:txBody>
+      </p:sp>
+    </p:spTree>
+    <p:extLst>
+      <p:ext uri="{BB962C8B-B14F-4D97-AF65-F5344CB8AC3E}">
+        <p14:creationId xmlns:p14="http://schemas.microsoft.com/office/powerpoint/2010/main" val="2739262936"/>
+      </p:ext>
+    </p:extLst>
+  </p:cSld>
+  <p:clrMapOvr>
+    <a:masterClrMapping/>
+  </p:clrMapOvr>
+</p:notes>
+</file>
+
+<file path=ppt/notesSlides/notesSlide2.xml><?xml version="1.0" encoding="utf-8"?>
+<p:notes xmlns:a="http://schemas.openxmlformats.org/drawingml/2006/main" xmlns:r="http://schemas.openxmlformats.org/officeDocument/2006/relationships" xmlns:p="http://schemas.openxmlformats.org/presentationml/2006/main">
+  <p:cSld>
+    <p:spTree>
+      <p:nvGrpSpPr>
+        <p:cNvPr id="1" name=""/>
+        <p:cNvGrpSpPr/>
+        <p:nvPr/>
+      </p:nvGrpSpPr>
+      <p:grpSpPr>
+        <a:xfrm>
+          <a:off x="0" y="0"/>
+          <a:ext cx="0" cy="0"/>
+          <a:chOff x="0" y="0"/>
+          <a:chExt cx="0" cy="0"/>
+        </a:xfrm>
+      </p:grpSpPr>
+      <p:sp>
+        <p:nvSpPr>
+          <p:cNvPr id="2" name="Slide Image Placeholder 1"/>
+          <p:cNvSpPr>
+            <a:spLocks noGrp="1" noRot="1" noChangeAspect="1"/>
+          </p:cNvSpPr>
+          <p:nvPr>
+            <p:ph type="sldImg"/>
+          </p:nvPr>
+        </p:nvSpPr>
+        <p:spPr/>
+      </p:sp>
+      <p:sp>
+        <p:nvSpPr>
+          <p:cNvPr id="3" name="Notes Placeholder 2"/>
+          <p:cNvSpPr>
+            <a:spLocks noGrp="1"/>
+          </p:cNvSpPr>
+          <p:nvPr>
+            <p:ph type="body" idx="1"/>
+          </p:nvPr>
+        </p:nvSpPr>
+        <p:spPr/>
+        <p:txBody>
+          <a:bodyPr/>
+          <a:lstStyle/>
+          <a:p>
+            <a:r>
+              <a:rPr lang="en-US" dirty="0" err="1"/>
+              <a:t>BatchNorm</a:t>
+            </a:r>
+            <a:r>
+              <a:rPr lang="en-US" dirty="0"/>
+              <a:t> after each layer to normalize activation, stabilizes distribution</a:t>
+            </a:r>
+          </a:p>
+        </p:txBody>
+      </p:sp>
+      <p:sp>
+        <p:nvSpPr>
+          <p:cNvPr id="4" name="Slide Number Placeholder 3"/>
+          <p:cNvSpPr>
+            <a:spLocks noGrp="1"/>
+          </p:cNvSpPr>
+          <p:nvPr>
+            <p:ph type="sldNum" sz="quarter" idx="5"/>
+          </p:nvPr>
+        </p:nvSpPr>
+        <p:spPr/>
+        <p:txBody>
+          <a:bodyPr/>
+          <a:lstStyle/>
+          <a:p>
+            <a:fld id="{3A6D4FA5-9B1B-4DF8-A772-70222F2067D9}" type="slidenum">
+              <a:rPr lang="en-US" smtClean="0"/>
+              <a:t>4</a:t>
+            </a:fld>
+            <a:endParaRPr lang="en-US"/>
+          </a:p>
+        </p:txBody>
+      </p:sp>
+    </p:spTree>
+    <p:extLst>
+      <p:ext uri="{BB962C8B-B14F-4D97-AF65-F5344CB8AC3E}">
+        <p14:creationId xmlns:p14="http://schemas.microsoft.com/office/powerpoint/2010/main" val="588109343"/>
+      </p:ext>
+    </p:extLst>
+  </p:cSld>
+  <p:clrMapOvr>
+    <a:masterClrMapping/>
+  </p:clrMapOvr>
+</p:notes>
+</file>
+
+<file path=ppt/notesSlides/notesSlide3.xml><?xml version="1.0" encoding="utf-8"?>
 <p:notes xmlns:a="http://schemas.openxmlformats.org/drawingml/2006/main" xmlns:r="http://schemas.openxmlformats.org/officeDocument/2006/relationships" xmlns:p="http://schemas.openxmlformats.org/presentationml/2006/main">
   <p:cSld>
     <p:spTree>
@@ -6612,13 +6796,6 @@
               <a:rPr lang="en-US" dirty="0"/>
               <a:t>Performance metric was accuracy over all 5 folds</a:t>
             </a:r>
-          </a:p>
-          <a:p>
-            <a:pPr lvl="3"/>
-            <a:r>
-              <a:rPr lang="en-US" dirty="0"/>
-              <a:t>Perfectly balanced classes</a:t>
-            </a:r>
             <a:endParaRPr lang="en-US" b="1" dirty="0"/>
           </a:p>
           <a:p>
@@ -6633,13 +6810,6 @@
             <a:r>
               <a:rPr lang="en-US" dirty="0"/>
               <a:t>48 dimensions to 31 dimensions</a:t>
-            </a:r>
-          </a:p>
-          <a:p>
-            <a:pPr lvl="2"/>
-            <a:r>
-              <a:rPr lang="en-US" dirty="0"/>
-              <a:t>95% variance threshold</a:t>
             </a:r>
           </a:p>
           <a:p>
@@ -6889,7 +7059,55 @@
           </a:p>
           <a:p>
             <a:pPr lvl="1"/>
+            <a:r>
+              <a:rPr lang="en-US" dirty="0" err="1"/>
+              <a:t>BatchNorm</a:t>
+            </a:r>
+            <a:r>
+              <a:rPr lang="en-US" dirty="0"/>
+              <a:t> after each layer</a:t>
+            </a:r>
+          </a:p>
+          <a:p>
+            <a:pPr lvl="1"/>
+            <a:r>
+              <a:rPr lang="en-US" dirty="0"/>
+              <a:t>Activation function was </a:t>
+            </a:r>
+            <a:r>
+              <a:rPr lang="en-US" dirty="0" err="1"/>
+              <a:t>ReLU</a:t>
+            </a:r>
             <a:endParaRPr lang="en-US" dirty="0"/>
+          </a:p>
+          <a:p>
+            <a:pPr lvl="1"/>
+            <a:r>
+              <a:rPr lang="en-US" dirty="0"/>
+              <a:t>Dropout (0.3)</a:t>
+            </a:r>
+          </a:p>
+          <a:p>
+            <a:pPr lvl="1"/>
+            <a:r>
+              <a:rPr lang="en-US" dirty="0"/>
+              <a:t>Adam used for learning rate</a:t>
+            </a:r>
+          </a:p>
+          <a:p>
+            <a:pPr lvl="1"/>
+            <a:r>
+              <a:rPr lang="en-US" dirty="0"/>
+              <a:t>Performance validated with </a:t>
+            </a:r>
+            <a:r>
+              <a:rPr lang="en-US" dirty="0" err="1"/>
+              <a:t>StratifiedKFold</a:t>
+            </a:r>
+            <a:r>
+              <a:rPr lang="en-US" dirty="0"/>
+              <a:t> (k=5)</a:t>
+            </a:r>
           </a:p>
         </p:txBody>
       </p:sp>
@@ -6972,7 +7190,57 @@
           <a:bodyPr/>
           <a:lstStyle/>
           <a:p>
-            <a:endParaRPr lang="en-US"/>
+            <a:r>
+              <a:rPr lang="en-US" dirty="0"/>
+              <a:t>Five-Fold CV results (80%)</a:t>
+            </a:r>
+          </a:p>
+          <a:p>
+            <a:pPr lvl="1"/>
+            <a:r>
+              <a:rPr lang="en-US" dirty="0"/>
+              <a:t>Accuracy: 0.761</a:t>
+            </a:r>
+          </a:p>
+          <a:p>
+            <a:pPr lvl="1"/>
+            <a:r>
+              <a:rPr lang="en-US" dirty="0"/>
+              <a:t>F1: 0.759</a:t>
+            </a:r>
+          </a:p>
+          <a:p>
+            <a:r>
+              <a:rPr lang="en-US" dirty="0"/>
+              <a:t>Held out 20%</a:t>
+            </a:r>
+          </a:p>
+          <a:p>
+            <a:pPr lvl="1"/>
+            <a:r>
+              <a:rPr lang="en-US" dirty="0"/>
+              <a:t>Accuracy: 0.771</a:t>
+            </a:r>
+          </a:p>
+          <a:p>
+            <a:pPr lvl="1"/>
+            <a:r>
+              <a:rPr lang="en-US" dirty="0"/>
+              <a:t>F1: 0.769</a:t>
+            </a:r>
+          </a:p>
+          <a:p>
+            <a:r>
+              <a:rPr lang="en-US" dirty="0"/>
+              <a:t>Predicted Results:</a:t>
+            </a:r>
+          </a:p>
+          <a:p>
+            <a:pPr lvl="1"/>
+            <a:r>
+              <a:rPr lang="en-US" dirty="0"/>
+              <a:t>Similar to held out set. </a:t>
+            </a:r>
           </a:p>
         </p:txBody>
       </p:sp>
